--- a/goc-hoc-tap/bai-hoc-gddp11/cd1-nd4-dinh-huong-du-lich.pptx
+++ b/goc-hoc-tap/bai-hoc-gddp11/cd1-nd4-dinh-huong-du-lich.pptx
@@ -1,6 +1,6 @@
 
 <file path=ppt/presentation.xml><?xml version="1.0" encoding="utf-8"?>
-<p:presentation xmlns:a="http://schemas.openxmlformats.org/drawingml/2006/main" xmlns:r="http://schemas.openxmlformats.org/officeDocument/2006/relationships" xmlns:p="http://schemas.openxmlformats.org/presentationml/2006/main" saveSubsetFonts="1">
+<p:presentation xmlns:a="http://schemas.openxmlformats.org/drawingml/2006/main" xmlns:r="http://schemas.openxmlformats.org/officeDocument/2006/relationships" xmlns:p="http://schemas.openxmlformats.org/presentationml/2006/main" saveSubsetFonts="1" autoCompressPictures="0">
   <p:sldMasterIdLst>
     <p:sldMasterId id="2147483648" r:id="rId1"/>
   </p:sldMasterIdLst>
@@ -16,14 +16,1333 @@
     <p:sldId id="264" r:id="rId10"/>
     <p:sldId id="265" r:id="rId11"/>
   </p:sldIdLst>
+  <p:notesMasterIdLst>
+    <p:notesMasterId r:id="rId12"/>
+  </p:notesMasterIdLst>
   <p:sldSz cx="12192000" cy="6858000"/>
-  <p:notesSz cx="6858000" cy="9144000"/>
+  <p:notesSz cx="6858000" cy="12192000"/>
   <p:defaultTextStyle>
-    <a:defPPr>
-      <a:defRPr lang="vi-VN"/>
-    </a:defPPr>
+    <a:lvl1pPr marL="0" algn="l" defTabSz="914400" rtl="0" eaLnBrk="1" latinLnBrk="0" hangingPunct="1">
+      <a:defRPr sz="1800" kern="1200">
+        <a:solidFill>
+          <a:schemeClr val="tx1"/>
+        </a:solidFill>
+        <a:latin typeface="+mn-lt"/>
+        <a:ea typeface="+mn-ea"/>
+        <a:cs typeface="+mn-cs"/>
+      </a:defRPr>
+    </a:lvl1pPr>
+    <a:lvl2pPr marL="457200" algn="l" defTabSz="914400" rtl="0" eaLnBrk="1" latinLnBrk="0" hangingPunct="1">
+      <a:defRPr sz="1800" kern="1200">
+        <a:solidFill>
+          <a:schemeClr val="tx1"/>
+        </a:solidFill>
+        <a:latin typeface="+mn-lt"/>
+        <a:ea typeface="+mn-ea"/>
+        <a:cs typeface="+mn-cs"/>
+      </a:defRPr>
+    </a:lvl2pPr>
+    <a:lvl3pPr marL="914400" algn="l" defTabSz="914400" rtl="0" eaLnBrk="1" latinLnBrk="0" hangingPunct="1">
+      <a:defRPr sz="1800" kern="1200">
+        <a:solidFill>
+          <a:schemeClr val="tx1"/>
+        </a:solidFill>
+        <a:latin typeface="+mn-lt"/>
+        <a:ea typeface="+mn-ea"/>
+        <a:cs typeface="+mn-cs"/>
+      </a:defRPr>
+    </a:lvl3pPr>
+    <a:lvl4pPr marL="1371600" algn="l" defTabSz="914400" rtl="0" eaLnBrk="1" latinLnBrk="0" hangingPunct="1">
+      <a:defRPr sz="1800" kern="1200">
+        <a:solidFill>
+          <a:schemeClr val="tx1"/>
+        </a:solidFill>
+        <a:latin typeface="+mn-lt"/>
+        <a:ea typeface="+mn-ea"/>
+        <a:cs typeface="+mn-cs"/>
+      </a:defRPr>
+    </a:lvl4pPr>
+    <a:lvl5pPr marL="1828800" algn="l" defTabSz="914400" rtl="0" eaLnBrk="1" latinLnBrk="0" hangingPunct="1">
+      <a:defRPr sz="1800" kern="1200">
+        <a:solidFill>
+          <a:schemeClr val="tx1"/>
+        </a:solidFill>
+        <a:latin typeface="+mn-lt"/>
+        <a:ea typeface="+mn-ea"/>
+        <a:cs typeface="+mn-cs"/>
+      </a:defRPr>
+    </a:lvl5pPr>
+    <a:lvl6pPr marL="2286000" algn="l" defTabSz="914400" rtl="0" eaLnBrk="1" latinLnBrk="0" hangingPunct="1">
+      <a:defRPr sz="1800" kern="1200">
+        <a:solidFill>
+          <a:schemeClr val="tx1"/>
+        </a:solidFill>
+        <a:latin typeface="+mn-lt"/>
+        <a:ea typeface="+mn-ea"/>
+        <a:cs typeface="+mn-cs"/>
+      </a:defRPr>
+    </a:lvl6pPr>
+    <a:lvl7pPr marL="2743200" algn="l" defTabSz="914400" rtl="0" eaLnBrk="1" latinLnBrk="0" hangingPunct="1">
+      <a:defRPr sz="1800" kern="1200">
+        <a:solidFill>
+          <a:schemeClr val="tx1"/>
+        </a:solidFill>
+        <a:latin typeface="+mn-lt"/>
+        <a:ea typeface="+mn-ea"/>
+        <a:cs typeface="+mn-cs"/>
+      </a:defRPr>
+    </a:lvl7pPr>
+    <a:lvl8pPr marL="3200400" algn="l" defTabSz="914400" rtl="0" eaLnBrk="1" latinLnBrk="0" hangingPunct="1">
+      <a:defRPr sz="1800" kern="1200">
+        <a:solidFill>
+          <a:schemeClr val="tx1"/>
+        </a:solidFill>
+        <a:latin typeface="+mn-lt"/>
+        <a:ea typeface="+mn-ea"/>
+        <a:cs typeface="+mn-cs"/>
+      </a:defRPr>
+    </a:lvl8pPr>
+    <a:lvl9pPr marL="3657600" algn="l" defTabSz="914400" rtl="0" eaLnBrk="1" latinLnBrk="0" hangingPunct="1">
+      <a:defRPr sz="1800" kern="1200">
+        <a:solidFill>
+          <a:schemeClr val="tx1"/>
+        </a:solidFill>
+        <a:latin typeface="+mn-lt"/>
+        <a:ea typeface="+mn-ea"/>
+        <a:cs typeface="+mn-cs"/>
+      </a:defRPr>
+    </a:lvl9pPr>
   </p:defaultTextStyle>
 </p:presentation>
+</file>
+
+<file path=ppt/notesMasters/notesMaster1.xml><?xml version="1.0" encoding="utf-8"?>
+<p:notesMaster xmlns:a="http://schemas.openxmlformats.org/drawingml/2006/main" xmlns:r="http://schemas.openxmlformats.org/officeDocument/2006/relationships" xmlns:p="http://schemas.openxmlformats.org/presentationml/2006/main">
+  <p:cSld>
+    <p:bg>
+      <p:bgRef idx="1001">
+        <a:schemeClr val="bg1"/>
+      </p:bgRef>
+    </p:bg>
+    <p:spTree>
+      <p:nvGrpSpPr>
+        <p:cNvPr id="1" name=""/>
+        <p:cNvGrpSpPr/>
+        <p:nvPr/>
+      </p:nvGrpSpPr>
+      <p:grpSpPr>
+        <a:xfrm>
+          <a:off x="0" y="0"/>
+          <a:ext cx="0" cy="0"/>
+          <a:chOff x="0" y="0"/>
+          <a:chExt cx="0" cy="0"/>
+        </a:xfrm>
+      </p:grpSpPr>
+      <p:sp>
+        <p:nvSpPr>
+          <p:cNvPr id="2" name="Header Placeholder 1"/>
+          <p:cNvSpPr>
+            <a:spLocks noGrp="1"/>
+          </p:cNvSpPr>
+          <p:nvPr>
+            <p:ph type="hdr" sz="quarter"/>
+          </p:nvPr>
+        </p:nvSpPr>
+        <p:spPr>
+          <a:xfrm>
+            <a:off x="0" y="0"/>
+            <a:ext cx="2971800" cy="458788"/>
+          </a:xfrm>
+          <a:prstGeom prst="rect">
+            <a:avLst/>
+          </a:prstGeom>
+        </p:spPr>
+        <p:txBody>
+          <a:bodyPr vert="horz" lIns="91440" tIns="45720" rIns="91440" bIns="45720" rtlCol="0"/>
+          <a:lstStyle>
+            <a:lvl1pPr algn="l">
+              <a:defRPr sz="1200"/>
+            </a:lvl1pPr>
+          </a:lstStyle>
+          <a:p>
+            <a:endParaRPr lang="en-US"/>
+          </a:p>
+        </p:txBody>
+      </p:sp>
+      <p:sp>
+        <p:nvSpPr>
+          <p:cNvPr id="3" name="Date Placeholder 2"/>
+          <p:cNvSpPr>
+            <a:spLocks noGrp="1"/>
+          </p:cNvSpPr>
+          <p:nvPr>
+            <p:ph type="dt" idx="1"/>
+          </p:nvPr>
+        </p:nvSpPr>
+        <p:spPr>
+          <a:xfrm>
+            <a:off x="3884613" y="0"/>
+            <a:ext cx="2971800" cy="458788"/>
+          </a:xfrm>
+          <a:prstGeom prst="rect">
+            <a:avLst/>
+          </a:prstGeom>
+        </p:spPr>
+        <p:txBody>
+          <a:bodyPr vert="horz" lIns="91440" tIns="45720" rIns="91440" bIns="45720" rtlCol="0"/>
+          <a:lstStyle>
+            <a:lvl1pPr algn="r">
+              <a:defRPr sz="1200"/>
+            </a:lvl1pPr>
+          </a:lstStyle>
+          <a:p>
+            <a:fld id="{5282F153-3F37-0F45-9E97-73ACFA13230C}" type="datetimeFigureOut">
+              <a:rPr lang="en-US"/>
+              <a:t>7/23/19</a:t>
+            </a:fld>
+            <a:endParaRPr lang="en-US"/>
+          </a:p>
+        </p:txBody>
+      </p:sp>
+      <p:sp>
+        <p:nvSpPr>
+          <p:cNvPr id="4" name="Slide Image Placeholder 3"/>
+          <p:cNvSpPr>
+            <a:spLocks noGrp="1" noRot="1" noChangeAspect="1"/>
+          </p:cNvSpPr>
+          <p:nvPr>
+            <p:ph type="sldImg" idx="2"/>
+          </p:nvPr>
+        </p:nvSpPr>
+        <p:spPr>
+          <a:xfrm>
+            <a:off x="685800" y="1143000"/>
+            <a:ext cx="5486400" cy="3086100"/>
+          </a:xfrm>
+          <a:prstGeom prst="rect">
+            <a:avLst/>
+          </a:prstGeom>
+          <a:noFill/>
+          <a:ln w="12700">
+            <a:solidFill>
+              <a:prstClr val="black"/>
+            </a:solidFill>
+          </a:ln>
+        </p:spPr>
+        <p:txBody>
+          <a:bodyPr vert="horz" lIns="91440" tIns="45720" rIns="91440" bIns="45720" rtlCol="0" anchor="ctr"/>
+          <a:lstStyle/>
+          <a:p>
+            <a:endParaRPr lang="en-US"/>
+          </a:p>
+        </p:txBody>
+      </p:sp>
+      <p:sp>
+        <p:nvSpPr>
+          <p:cNvPr id="5" name="Notes Placeholder 4"/>
+          <p:cNvSpPr>
+            <a:spLocks noGrp="1"/>
+          </p:cNvSpPr>
+          <p:nvPr>
+            <p:ph type="body" sz="quarter" idx="3"/>
+          </p:nvPr>
+        </p:nvSpPr>
+        <p:spPr>
+          <a:xfrm>
+            <a:off x="685800" y="4400550"/>
+            <a:ext cx="5486400" cy="3600450"/>
+          </a:xfrm>
+          <a:prstGeom prst="rect">
+            <a:avLst/>
+          </a:prstGeom>
+        </p:spPr>
+        <p:txBody>
+          <a:bodyPr vert="horz" lIns="91440" tIns="45720" rIns="91440" bIns="45720" rtlCol="0"/>
+          <a:lstStyle/>
+          <a:p>
+            <a:pPr lvl="0"/>
+            <a:r>
+              <a:rPr lang="en-US"/>
+              <a:t>Click to edit Master text styles</a:t>
+            </a:r>
+          </a:p>
+          <a:p>
+            <a:pPr lvl="1"/>
+            <a:r>
+              <a:rPr lang="en-US"/>
+              <a:t>Second level</a:t>
+            </a:r>
+          </a:p>
+          <a:p>
+            <a:pPr lvl="2"/>
+            <a:r>
+              <a:rPr lang="en-US"/>
+              <a:t>Third level</a:t>
+            </a:r>
+          </a:p>
+          <a:p>
+            <a:pPr lvl="3"/>
+            <a:r>
+              <a:rPr lang="en-US"/>
+              <a:t>Fourth level</a:t>
+            </a:r>
+          </a:p>
+          <a:p>
+            <a:pPr lvl="4"/>
+            <a:r>
+              <a:rPr lang="en-US"/>
+              <a:t>Fifth level</a:t>
+            </a:r>
+          </a:p>
+        </p:txBody>
+      </p:sp>
+      <p:sp>
+        <p:nvSpPr>
+          <p:cNvPr id="6" name="Footer Placeholder 5"/>
+          <p:cNvSpPr>
+            <a:spLocks noGrp="1"/>
+          </p:cNvSpPr>
+          <p:nvPr>
+            <p:ph type="ftr" sz="quarter" idx="4"/>
+          </p:nvPr>
+        </p:nvSpPr>
+        <p:spPr>
+          <a:xfrm>
+            <a:off x="0" y="8685213"/>
+            <a:ext cx="2971800" cy="458787"/>
+          </a:xfrm>
+          <a:prstGeom prst="rect">
+            <a:avLst/>
+          </a:prstGeom>
+        </p:spPr>
+        <p:txBody>
+          <a:bodyPr vert="horz" lIns="91440" tIns="45720" rIns="91440" bIns="45720" rtlCol="0" anchor="b"/>
+          <a:lstStyle>
+            <a:lvl1pPr algn="l">
+              <a:defRPr sz="1200"/>
+            </a:lvl1pPr>
+          </a:lstStyle>
+          <a:p>
+            <a:endParaRPr lang="en-US"/>
+          </a:p>
+        </p:txBody>
+      </p:sp>
+      <p:sp>
+        <p:nvSpPr>
+          <p:cNvPr id="7" name="Slide Number Placeholder 6"/>
+          <p:cNvSpPr>
+            <a:spLocks noGrp="1"/>
+          </p:cNvSpPr>
+          <p:nvPr>
+            <p:ph type="sldNum" sz="quarter" idx="5"/>
+          </p:nvPr>
+        </p:nvSpPr>
+        <p:spPr>
+          <a:xfrm>
+            <a:off x="3884613" y="8685213"/>
+            <a:ext cx="2971800" cy="458787"/>
+          </a:xfrm>
+          <a:prstGeom prst="rect">
+            <a:avLst/>
+          </a:prstGeom>
+        </p:spPr>
+        <p:txBody>
+          <a:bodyPr vert="horz" lIns="91440" tIns="45720" rIns="91440" bIns="45720" rtlCol="0" anchor="b"/>
+          <a:lstStyle>
+            <a:lvl1pPr algn="r">
+              <a:defRPr sz="1200"/>
+            </a:lvl1pPr>
+          </a:lstStyle>
+          <a:p>
+            <a:fld id="{CE5E9CC1-C706-0F49-92D6-E571CC5EEA8F}" type="slidenum">
+              <a:rPr lang="en-US"/>
+              <a:t>‹#›</a:t>
+            </a:fld>
+            <a:endParaRPr lang="en-US"/>
+          </a:p>
+        </p:txBody>
+      </p:sp>
+    </p:spTree>
+    <p:extLst>
+      <p:ext uri="{BB962C8B-B14F-4D97-AF65-F5344CB8AC3E}">
+        <p14:creationId xmlns:p14="http://schemas.microsoft.com/office/powerpoint/2010/main" val="1024086991"/>
+      </p:ext>
+    </p:extLst>
+  </p:cSld>
+  <p:clrMap bg1="lt1" tx1="dk1" bg2="lt2" tx2="dk2" accent1="accent1" accent2="accent2" accent3="accent3" accent4="accent4" accent5="accent5" accent6="accent6" hlink="hlink" folHlink="folHlink"/>
+  <p:notesStyle>
+    <a:lvl1pPr marL="0" algn="l" defTabSz="914400" rtl="0" eaLnBrk="1" latinLnBrk="0" hangingPunct="1">
+      <a:defRPr sz="1200" kern="1200">
+        <a:solidFill>
+          <a:schemeClr val="tx1"/>
+        </a:solidFill>
+        <a:latin typeface="+mn-lt"/>
+        <a:ea typeface="+mn-ea"/>
+        <a:cs typeface="+mn-cs"/>
+      </a:defRPr>
+    </a:lvl1pPr>
+    <a:lvl2pPr marL="457200" algn="l" defTabSz="914400" rtl="0" eaLnBrk="1" latinLnBrk="0" hangingPunct="1">
+      <a:defRPr sz="1200" kern="1200">
+        <a:solidFill>
+          <a:schemeClr val="tx1"/>
+        </a:solidFill>
+        <a:latin typeface="+mn-lt"/>
+        <a:ea typeface="+mn-ea"/>
+        <a:cs typeface="+mn-cs"/>
+      </a:defRPr>
+    </a:lvl2pPr>
+    <a:lvl3pPr marL="914400" algn="l" defTabSz="914400" rtl="0" eaLnBrk="1" latinLnBrk="0" hangingPunct="1">
+      <a:defRPr sz="1200" kern="1200">
+        <a:solidFill>
+          <a:schemeClr val="tx1"/>
+        </a:solidFill>
+        <a:latin typeface="+mn-lt"/>
+        <a:ea typeface="+mn-ea"/>
+        <a:cs typeface="+mn-cs"/>
+      </a:defRPr>
+    </a:lvl3pPr>
+    <a:lvl4pPr marL="1371600" algn="l" defTabSz="914400" rtl="0" eaLnBrk="1" latinLnBrk="0" hangingPunct="1">
+      <a:defRPr sz="1200" kern="1200">
+        <a:solidFill>
+          <a:schemeClr val="tx1"/>
+        </a:solidFill>
+        <a:latin typeface="+mn-lt"/>
+        <a:ea typeface="+mn-ea"/>
+        <a:cs typeface="+mn-cs"/>
+      </a:defRPr>
+    </a:lvl4pPr>
+    <a:lvl5pPr marL="1828800" algn="l" defTabSz="914400" rtl="0" eaLnBrk="1" latinLnBrk="0" hangingPunct="1">
+      <a:defRPr sz="1200" kern="1200">
+        <a:solidFill>
+          <a:schemeClr val="tx1"/>
+        </a:solidFill>
+        <a:latin typeface="+mn-lt"/>
+        <a:ea typeface="+mn-ea"/>
+        <a:cs typeface="+mn-cs"/>
+      </a:defRPr>
+    </a:lvl5pPr>
+    <a:lvl6pPr marL="2286000" algn="l" defTabSz="914400" rtl="0" eaLnBrk="1" latinLnBrk="0" hangingPunct="1">
+      <a:defRPr sz="1200" kern="1200">
+        <a:solidFill>
+          <a:schemeClr val="tx1"/>
+        </a:solidFill>
+        <a:latin typeface="+mn-lt"/>
+        <a:ea typeface="+mn-ea"/>
+        <a:cs typeface="+mn-cs"/>
+      </a:defRPr>
+    </a:lvl6pPr>
+    <a:lvl7pPr marL="2743200" algn="l" defTabSz="914400" rtl="0" eaLnBrk="1" latinLnBrk="0" hangingPunct="1">
+      <a:defRPr sz="1200" kern="1200">
+        <a:solidFill>
+          <a:schemeClr val="tx1"/>
+        </a:solidFill>
+        <a:latin typeface="+mn-lt"/>
+        <a:ea typeface="+mn-ea"/>
+        <a:cs typeface="+mn-cs"/>
+      </a:defRPr>
+    </a:lvl7pPr>
+    <a:lvl8pPr marL="3200400" algn="l" defTabSz="914400" rtl="0" eaLnBrk="1" latinLnBrk="0" hangingPunct="1">
+      <a:defRPr sz="1200" kern="1200">
+        <a:solidFill>
+          <a:schemeClr val="tx1"/>
+        </a:solidFill>
+        <a:latin typeface="+mn-lt"/>
+        <a:ea typeface="+mn-ea"/>
+        <a:cs typeface="+mn-cs"/>
+      </a:defRPr>
+    </a:lvl8pPr>
+    <a:lvl9pPr marL="3657600" algn="l" defTabSz="914400" rtl="0" eaLnBrk="1" latinLnBrk="0" hangingPunct="1">
+      <a:defRPr sz="1200" kern="1200">
+        <a:solidFill>
+          <a:schemeClr val="tx1"/>
+        </a:solidFill>
+        <a:latin typeface="+mn-lt"/>
+        <a:ea typeface="+mn-ea"/>
+        <a:cs typeface="+mn-cs"/>
+      </a:defRPr>
+    </a:lvl9pPr>
+  </p:notesStyle>
+</p:notesMaster>
+</file>
+
+<file path=ppt/notesSlides/notesSlide1.xml><?xml version="1.0" encoding="utf-8"?>
+<p:notes xmlns:a="http://schemas.openxmlformats.org/drawingml/2006/main" xmlns:r="http://schemas.openxmlformats.org/officeDocument/2006/relationships" xmlns:p="http://schemas.openxmlformats.org/presentationml/2006/main">
+  <p:cSld>
+    <p:spTree>
+      <p:nvGrpSpPr>
+        <p:cNvPr id="1" name=""/>
+        <p:cNvGrpSpPr/>
+        <p:nvPr/>
+      </p:nvGrpSpPr>
+      <p:grpSpPr>
+        <a:xfrm>
+          <a:off x="0" y="0"/>
+          <a:ext cx="0" cy="0"/>
+          <a:chOff x="0" y="0"/>
+          <a:chExt cx="0" cy="0"/>
+        </a:xfrm>
+      </p:grpSpPr>
+      <p:sp>
+        <p:nvSpPr>
+          <p:cNvPr id="2" name="Slide Image Placeholder 1"/>
+          <p:cNvSpPr>
+            <a:spLocks noGrp="1" noRot="1" noChangeAspect="1"/>
+          </p:cNvSpPr>
+          <p:nvPr>
+            <p:ph type="sldImg"/>
+          </p:nvPr>
+        </p:nvSpPr>
+        <p:spPr/>
+      </p:sp>
+      <p:sp>
+        <p:nvSpPr>
+          <p:cNvPr id="3" name="Notes Placeholder 2"/>
+          <p:cNvSpPr>
+            <a:spLocks noGrp="1"/>
+          </p:cNvSpPr>
+          <p:nvPr>
+            <p:ph type="body" idx="1"/>
+          </p:nvPr>
+        </p:nvSpPr>
+        <p:spPr/>
+        <p:txBody>
+          <a:bodyPr/>
+          <a:lstStyle/>
+          <a:p>
+            <a:r>
+              <a:rPr lang="en-US" dirty="0"/>
+              <a:t/>
+            </a:r>
+            <a:endParaRPr lang="en-US" dirty="0"/>
+          </a:p>
+        </p:txBody>
+      </p:sp>
+      <p:sp>
+        <p:nvSpPr>
+          <p:cNvPr id="4" name="Slide Number Placeholder 3"/>
+          <p:cNvSpPr>
+            <a:spLocks noGrp="1"/>
+          </p:cNvSpPr>
+          <p:nvPr>
+            <p:ph type="sldNum" sz="quarter" idx="10"/>
+          </p:nvPr>
+        </p:nvSpPr>
+        <p:spPr/>
+        <p:txBody>
+          <a:bodyPr/>
+          <a:lstStyle/>
+          <a:p>
+            <a:fld id="{F7021451-1387-4CA6-816F-3879F97B5CBC}" type="slidenum">
+              <a:rPr lang="en-US"/>
+              <a:t>1</a:t>
+            </a:fld>
+            <a:endParaRPr lang="en-US"/>
+          </a:p>
+        </p:txBody>
+      </p:sp>
+    </p:spTree>
+    <p:extLst>
+      <p:ext uri="{BB962C8B-B14F-4D97-AF65-F5344CB8AC3E}">
+        <p14:creationId xmlns:p14="http://schemas.microsoft.com/office/powerpoint/2010/main" val="1024086991"/>
+      </p:ext>
+    </p:extLst>
+  </p:cSld>
+  <p:clrMapOvr>
+    <a:masterClrMapping/>
+  </p:clrMapOvr>
+</p:notes>
+</file>
+
+<file path=ppt/notesSlides/notesSlide10.xml><?xml version="1.0" encoding="utf-8"?>
+<p:notes xmlns:a="http://schemas.openxmlformats.org/drawingml/2006/main" xmlns:r="http://schemas.openxmlformats.org/officeDocument/2006/relationships" xmlns:p="http://schemas.openxmlformats.org/presentationml/2006/main">
+  <p:cSld>
+    <p:spTree>
+      <p:nvGrpSpPr>
+        <p:cNvPr id="1" name=""/>
+        <p:cNvGrpSpPr/>
+        <p:nvPr/>
+      </p:nvGrpSpPr>
+      <p:grpSpPr>
+        <a:xfrm>
+          <a:off x="0" y="0"/>
+          <a:ext cx="0" cy="0"/>
+          <a:chOff x="0" y="0"/>
+          <a:chExt cx="0" cy="0"/>
+        </a:xfrm>
+      </p:grpSpPr>
+      <p:sp>
+        <p:nvSpPr>
+          <p:cNvPr id="2" name="Slide Image Placeholder 1"/>
+          <p:cNvSpPr>
+            <a:spLocks noGrp="1" noRot="1" noChangeAspect="1"/>
+          </p:cNvSpPr>
+          <p:nvPr>
+            <p:ph type="sldImg"/>
+          </p:nvPr>
+        </p:nvSpPr>
+        <p:spPr/>
+      </p:sp>
+      <p:sp>
+        <p:nvSpPr>
+          <p:cNvPr id="3" name="Notes Placeholder 2"/>
+          <p:cNvSpPr>
+            <a:spLocks noGrp="1"/>
+          </p:cNvSpPr>
+          <p:nvPr>
+            <p:ph type="body" idx="1"/>
+          </p:nvPr>
+        </p:nvSpPr>
+        <p:spPr/>
+        <p:txBody>
+          <a:bodyPr/>
+          <a:lstStyle/>
+          <a:p>
+            <a:r>
+              <a:rPr lang="en-US" dirty="0"/>
+              <a:t/>
+            </a:r>
+            <a:endParaRPr lang="en-US" dirty="0"/>
+          </a:p>
+        </p:txBody>
+      </p:sp>
+      <p:sp>
+        <p:nvSpPr>
+          <p:cNvPr id="4" name="Slide Number Placeholder 3"/>
+          <p:cNvSpPr>
+            <a:spLocks noGrp="1"/>
+          </p:cNvSpPr>
+          <p:nvPr>
+            <p:ph type="sldNum" sz="quarter" idx="10"/>
+          </p:nvPr>
+        </p:nvSpPr>
+        <p:spPr/>
+        <p:txBody>
+          <a:bodyPr/>
+          <a:lstStyle/>
+          <a:p>
+            <a:fld id="{F7021451-1387-4CA6-816F-3879F97B5CBC}" type="slidenum">
+              <a:rPr lang="en-US"/>
+              <a:t>10</a:t>
+            </a:fld>
+            <a:endParaRPr lang="en-US"/>
+          </a:p>
+        </p:txBody>
+      </p:sp>
+    </p:spTree>
+    <p:extLst>
+      <p:ext uri="{BB962C8B-B14F-4D97-AF65-F5344CB8AC3E}">
+        <p14:creationId xmlns:p14="http://schemas.microsoft.com/office/powerpoint/2010/main" val="1024086991"/>
+      </p:ext>
+    </p:extLst>
+  </p:cSld>
+  <p:clrMapOvr>
+    <a:masterClrMapping/>
+  </p:clrMapOvr>
+</p:notes>
+</file>
+
+<file path=ppt/notesSlides/notesSlide2.xml><?xml version="1.0" encoding="utf-8"?>
+<p:notes xmlns:a="http://schemas.openxmlformats.org/drawingml/2006/main" xmlns:r="http://schemas.openxmlformats.org/officeDocument/2006/relationships" xmlns:p="http://schemas.openxmlformats.org/presentationml/2006/main">
+  <p:cSld>
+    <p:spTree>
+      <p:nvGrpSpPr>
+        <p:cNvPr id="1" name=""/>
+        <p:cNvGrpSpPr/>
+        <p:nvPr/>
+      </p:nvGrpSpPr>
+      <p:grpSpPr>
+        <a:xfrm>
+          <a:off x="0" y="0"/>
+          <a:ext cx="0" cy="0"/>
+          <a:chOff x="0" y="0"/>
+          <a:chExt cx="0" cy="0"/>
+        </a:xfrm>
+      </p:grpSpPr>
+      <p:sp>
+        <p:nvSpPr>
+          <p:cNvPr id="2" name="Slide Image Placeholder 1"/>
+          <p:cNvSpPr>
+            <a:spLocks noGrp="1" noRot="1" noChangeAspect="1"/>
+          </p:cNvSpPr>
+          <p:nvPr>
+            <p:ph type="sldImg"/>
+          </p:nvPr>
+        </p:nvSpPr>
+        <p:spPr/>
+      </p:sp>
+      <p:sp>
+        <p:nvSpPr>
+          <p:cNvPr id="3" name="Notes Placeholder 2"/>
+          <p:cNvSpPr>
+            <a:spLocks noGrp="1"/>
+          </p:cNvSpPr>
+          <p:nvPr>
+            <p:ph type="body" idx="1"/>
+          </p:nvPr>
+        </p:nvSpPr>
+        <p:spPr/>
+        <p:txBody>
+          <a:bodyPr/>
+          <a:lstStyle/>
+          <a:p>
+            <a:r>
+              <a:rPr lang="en-US" dirty="0"/>
+              <a:t/>
+            </a:r>
+            <a:endParaRPr lang="en-US" dirty="0"/>
+          </a:p>
+        </p:txBody>
+      </p:sp>
+      <p:sp>
+        <p:nvSpPr>
+          <p:cNvPr id="4" name="Slide Number Placeholder 3"/>
+          <p:cNvSpPr>
+            <a:spLocks noGrp="1"/>
+          </p:cNvSpPr>
+          <p:nvPr>
+            <p:ph type="sldNum" sz="quarter" idx="10"/>
+          </p:nvPr>
+        </p:nvSpPr>
+        <p:spPr/>
+        <p:txBody>
+          <a:bodyPr/>
+          <a:lstStyle/>
+          <a:p>
+            <a:fld id="{F7021451-1387-4CA6-816F-3879F97B5CBC}" type="slidenum">
+              <a:rPr lang="en-US"/>
+              <a:t>2</a:t>
+            </a:fld>
+            <a:endParaRPr lang="en-US"/>
+          </a:p>
+        </p:txBody>
+      </p:sp>
+    </p:spTree>
+    <p:extLst>
+      <p:ext uri="{BB962C8B-B14F-4D97-AF65-F5344CB8AC3E}">
+        <p14:creationId xmlns:p14="http://schemas.microsoft.com/office/powerpoint/2010/main" val="1024086991"/>
+      </p:ext>
+    </p:extLst>
+  </p:cSld>
+  <p:clrMapOvr>
+    <a:masterClrMapping/>
+  </p:clrMapOvr>
+</p:notes>
+</file>
+
+<file path=ppt/notesSlides/notesSlide3.xml><?xml version="1.0" encoding="utf-8"?>
+<p:notes xmlns:a="http://schemas.openxmlformats.org/drawingml/2006/main" xmlns:r="http://schemas.openxmlformats.org/officeDocument/2006/relationships" xmlns:p="http://schemas.openxmlformats.org/presentationml/2006/main">
+  <p:cSld>
+    <p:spTree>
+      <p:nvGrpSpPr>
+        <p:cNvPr id="1" name=""/>
+        <p:cNvGrpSpPr/>
+        <p:nvPr/>
+      </p:nvGrpSpPr>
+      <p:grpSpPr>
+        <a:xfrm>
+          <a:off x="0" y="0"/>
+          <a:ext cx="0" cy="0"/>
+          <a:chOff x="0" y="0"/>
+          <a:chExt cx="0" cy="0"/>
+        </a:xfrm>
+      </p:grpSpPr>
+      <p:sp>
+        <p:nvSpPr>
+          <p:cNvPr id="2" name="Slide Image Placeholder 1"/>
+          <p:cNvSpPr>
+            <a:spLocks noGrp="1" noRot="1" noChangeAspect="1"/>
+          </p:cNvSpPr>
+          <p:nvPr>
+            <p:ph type="sldImg"/>
+          </p:nvPr>
+        </p:nvSpPr>
+        <p:spPr/>
+      </p:sp>
+      <p:sp>
+        <p:nvSpPr>
+          <p:cNvPr id="3" name="Notes Placeholder 2"/>
+          <p:cNvSpPr>
+            <a:spLocks noGrp="1"/>
+          </p:cNvSpPr>
+          <p:nvPr>
+            <p:ph type="body" idx="1"/>
+          </p:nvPr>
+        </p:nvSpPr>
+        <p:spPr/>
+        <p:txBody>
+          <a:bodyPr/>
+          <a:lstStyle/>
+          <a:p>
+            <a:r>
+              <a:rPr lang="en-US" dirty="0"/>
+              <a:t/>
+            </a:r>
+            <a:endParaRPr lang="en-US" dirty="0"/>
+          </a:p>
+        </p:txBody>
+      </p:sp>
+      <p:sp>
+        <p:nvSpPr>
+          <p:cNvPr id="4" name="Slide Number Placeholder 3"/>
+          <p:cNvSpPr>
+            <a:spLocks noGrp="1"/>
+          </p:cNvSpPr>
+          <p:nvPr>
+            <p:ph type="sldNum" sz="quarter" idx="10"/>
+          </p:nvPr>
+        </p:nvSpPr>
+        <p:spPr/>
+        <p:txBody>
+          <a:bodyPr/>
+          <a:lstStyle/>
+          <a:p>
+            <a:fld id="{F7021451-1387-4CA6-816F-3879F97B5CBC}" type="slidenum">
+              <a:rPr lang="en-US"/>
+              <a:t>3</a:t>
+            </a:fld>
+            <a:endParaRPr lang="en-US"/>
+          </a:p>
+        </p:txBody>
+      </p:sp>
+    </p:spTree>
+    <p:extLst>
+      <p:ext uri="{BB962C8B-B14F-4D97-AF65-F5344CB8AC3E}">
+        <p14:creationId xmlns:p14="http://schemas.microsoft.com/office/powerpoint/2010/main" val="1024086991"/>
+      </p:ext>
+    </p:extLst>
+  </p:cSld>
+  <p:clrMapOvr>
+    <a:masterClrMapping/>
+  </p:clrMapOvr>
+</p:notes>
+</file>
+
+<file path=ppt/notesSlides/notesSlide4.xml><?xml version="1.0" encoding="utf-8"?>
+<p:notes xmlns:a="http://schemas.openxmlformats.org/drawingml/2006/main" xmlns:r="http://schemas.openxmlformats.org/officeDocument/2006/relationships" xmlns:p="http://schemas.openxmlformats.org/presentationml/2006/main">
+  <p:cSld>
+    <p:spTree>
+      <p:nvGrpSpPr>
+        <p:cNvPr id="1" name=""/>
+        <p:cNvGrpSpPr/>
+        <p:nvPr/>
+      </p:nvGrpSpPr>
+      <p:grpSpPr>
+        <a:xfrm>
+          <a:off x="0" y="0"/>
+          <a:ext cx="0" cy="0"/>
+          <a:chOff x="0" y="0"/>
+          <a:chExt cx="0" cy="0"/>
+        </a:xfrm>
+      </p:grpSpPr>
+      <p:sp>
+        <p:nvSpPr>
+          <p:cNvPr id="2" name="Slide Image Placeholder 1"/>
+          <p:cNvSpPr>
+            <a:spLocks noGrp="1" noRot="1" noChangeAspect="1"/>
+          </p:cNvSpPr>
+          <p:nvPr>
+            <p:ph type="sldImg"/>
+          </p:nvPr>
+        </p:nvSpPr>
+        <p:spPr/>
+      </p:sp>
+      <p:sp>
+        <p:nvSpPr>
+          <p:cNvPr id="3" name="Notes Placeholder 2"/>
+          <p:cNvSpPr>
+            <a:spLocks noGrp="1"/>
+          </p:cNvSpPr>
+          <p:nvPr>
+            <p:ph type="body" idx="1"/>
+          </p:nvPr>
+        </p:nvSpPr>
+        <p:spPr/>
+        <p:txBody>
+          <a:bodyPr/>
+          <a:lstStyle/>
+          <a:p>
+            <a:r>
+              <a:rPr lang="en-US" dirty="0"/>
+              <a:t/>
+            </a:r>
+            <a:endParaRPr lang="en-US" dirty="0"/>
+          </a:p>
+        </p:txBody>
+      </p:sp>
+      <p:sp>
+        <p:nvSpPr>
+          <p:cNvPr id="4" name="Slide Number Placeholder 3"/>
+          <p:cNvSpPr>
+            <a:spLocks noGrp="1"/>
+          </p:cNvSpPr>
+          <p:nvPr>
+            <p:ph type="sldNum" sz="quarter" idx="10"/>
+          </p:nvPr>
+        </p:nvSpPr>
+        <p:spPr/>
+        <p:txBody>
+          <a:bodyPr/>
+          <a:lstStyle/>
+          <a:p>
+            <a:fld id="{F7021451-1387-4CA6-816F-3879F97B5CBC}" type="slidenum">
+              <a:rPr lang="en-US"/>
+              <a:t>4</a:t>
+            </a:fld>
+            <a:endParaRPr lang="en-US"/>
+          </a:p>
+        </p:txBody>
+      </p:sp>
+    </p:spTree>
+    <p:extLst>
+      <p:ext uri="{BB962C8B-B14F-4D97-AF65-F5344CB8AC3E}">
+        <p14:creationId xmlns:p14="http://schemas.microsoft.com/office/powerpoint/2010/main" val="1024086991"/>
+      </p:ext>
+    </p:extLst>
+  </p:cSld>
+  <p:clrMapOvr>
+    <a:masterClrMapping/>
+  </p:clrMapOvr>
+</p:notes>
+</file>
+
+<file path=ppt/notesSlides/notesSlide5.xml><?xml version="1.0" encoding="utf-8"?>
+<p:notes xmlns:a="http://schemas.openxmlformats.org/drawingml/2006/main" xmlns:r="http://schemas.openxmlformats.org/officeDocument/2006/relationships" xmlns:p="http://schemas.openxmlformats.org/presentationml/2006/main">
+  <p:cSld>
+    <p:spTree>
+      <p:nvGrpSpPr>
+        <p:cNvPr id="1" name=""/>
+        <p:cNvGrpSpPr/>
+        <p:nvPr/>
+      </p:nvGrpSpPr>
+      <p:grpSpPr>
+        <a:xfrm>
+          <a:off x="0" y="0"/>
+          <a:ext cx="0" cy="0"/>
+          <a:chOff x="0" y="0"/>
+          <a:chExt cx="0" cy="0"/>
+        </a:xfrm>
+      </p:grpSpPr>
+      <p:sp>
+        <p:nvSpPr>
+          <p:cNvPr id="2" name="Slide Image Placeholder 1"/>
+          <p:cNvSpPr>
+            <a:spLocks noGrp="1" noRot="1" noChangeAspect="1"/>
+          </p:cNvSpPr>
+          <p:nvPr>
+            <p:ph type="sldImg"/>
+          </p:nvPr>
+        </p:nvSpPr>
+        <p:spPr/>
+      </p:sp>
+      <p:sp>
+        <p:nvSpPr>
+          <p:cNvPr id="3" name="Notes Placeholder 2"/>
+          <p:cNvSpPr>
+            <a:spLocks noGrp="1"/>
+          </p:cNvSpPr>
+          <p:nvPr>
+            <p:ph type="body" idx="1"/>
+          </p:nvPr>
+        </p:nvSpPr>
+        <p:spPr/>
+        <p:txBody>
+          <a:bodyPr/>
+          <a:lstStyle/>
+          <a:p>
+            <a:r>
+              <a:rPr lang="en-US" dirty="0"/>
+              <a:t/>
+            </a:r>
+            <a:endParaRPr lang="en-US" dirty="0"/>
+          </a:p>
+        </p:txBody>
+      </p:sp>
+      <p:sp>
+        <p:nvSpPr>
+          <p:cNvPr id="4" name="Slide Number Placeholder 3"/>
+          <p:cNvSpPr>
+            <a:spLocks noGrp="1"/>
+          </p:cNvSpPr>
+          <p:nvPr>
+            <p:ph type="sldNum" sz="quarter" idx="10"/>
+          </p:nvPr>
+        </p:nvSpPr>
+        <p:spPr/>
+        <p:txBody>
+          <a:bodyPr/>
+          <a:lstStyle/>
+          <a:p>
+            <a:fld id="{F7021451-1387-4CA6-816F-3879F97B5CBC}" type="slidenum">
+              <a:rPr lang="en-US"/>
+              <a:t>5</a:t>
+            </a:fld>
+            <a:endParaRPr lang="en-US"/>
+          </a:p>
+        </p:txBody>
+      </p:sp>
+    </p:spTree>
+    <p:extLst>
+      <p:ext uri="{BB962C8B-B14F-4D97-AF65-F5344CB8AC3E}">
+        <p14:creationId xmlns:p14="http://schemas.microsoft.com/office/powerpoint/2010/main" val="1024086991"/>
+      </p:ext>
+    </p:extLst>
+  </p:cSld>
+  <p:clrMapOvr>
+    <a:masterClrMapping/>
+  </p:clrMapOvr>
+</p:notes>
+</file>
+
+<file path=ppt/notesSlides/notesSlide6.xml><?xml version="1.0" encoding="utf-8"?>
+<p:notes xmlns:a="http://schemas.openxmlformats.org/drawingml/2006/main" xmlns:r="http://schemas.openxmlformats.org/officeDocument/2006/relationships" xmlns:p="http://schemas.openxmlformats.org/presentationml/2006/main">
+  <p:cSld>
+    <p:spTree>
+      <p:nvGrpSpPr>
+        <p:cNvPr id="1" name=""/>
+        <p:cNvGrpSpPr/>
+        <p:nvPr/>
+      </p:nvGrpSpPr>
+      <p:grpSpPr>
+        <a:xfrm>
+          <a:off x="0" y="0"/>
+          <a:ext cx="0" cy="0"/>
+          <a:chOff x="0" y="0"/>
+          <a:chExt cx="0" cy="0"/>
+        </a:xfrm>
+      </p:grpSpPr>
+      <p:sp>
+        <p:nvSpPr>
+          <p:cNvPr id="2" name="Slide Image Placeholder 1"/>
+          <p:cNvSpPr>
+            <a:spLocks noGrp="1" noRot="1" noChangeAspect="1"/>
+          </p:cNvSpPr>
+          <p:nvPr>
+            <p:ph type="sldImg"/>
+          </p:nvPr>
+        </p:nvSpPr>
+        <p:spPr/>
+      </p:sp>
+      <p:sp>
+        <p:nvSpPr>
+          <p:cNvPr id="3" name="Notes Placeholder 2"/>
+          <p:cNvSpPr>
+            <a:spLocks noGrp="1"/>
+          </p:cNvSpPr>
+          <p:nvPr>
+            <p:ph type="body" idx="1"/>
+          </p:nvPr>
+        </p:nvSpPr>
+        <p:spPr/>
+        <p:txBody>
+          <a:bodyPr/>
+          <a:lstStyle/>
+          <a:p>
+            <a:r>
+              <a:rPr lang="en-US" dirty="0"/>
+              <a:t/>
+            </a:r>
+            <a:endParaRPr lang="en-US" dirty="0"/>
+          </a:p>
+        </p:txBody>
+      </p:sp>
+      <p:sp>
+        <p:nvSpPr>
+          <p:cNvPr id="4" name="Slide Number Placeholder 3"/>
+          <p:cNvSpPr>
+            <a:spLocks noGrp="1"/>
+          </p:cNvSpPr>
+          <p:nvPr>
+            <p:ph type="sldNum" sz="quarter" idx="10"/>
+          </p:nvPr>
+        </p:nvSpPr>
+        <p:spPr/>
+        <p:txBody>
+          <a:bodyPr/>
+          <a:lstStyle/>
+          <a:p>
+            <a:fld id="{F7021451-1387-4CA6-816F-3879F97B5CBC}" type="slidenum">
+              <a:rPr lang="en-US"/>
+              <a:t>6</a:t>
+            </a:fld>
+            <a:endParaRPr lang="en-US"/>
+          </a:p>
+        </p:txBody>
+      </p:sp>
+    </p:spTree>
+    <p:extLst>
+      <p:ext uri="{BB962C8B-B14F-4D97-AF65-F5344CB8AC3E}">
+        <p14:creationId xmlns:p14="http://schemas.microsoft.com/office/powerpoint/2010/main" val="1024086991"/>
+      </p:ext>
+    </p:extLst>
+  </p:cSld>
+  <p:clrMapOvr>
+    <a:masterClrMapping/>
+  </p:clrMapOvr>
+</p:notes>
+</file>
+
+<file path=ppt/notesSlides/notesSlide7.xml><?xml version="1.0" encoding="utf-8"?>
+<p:notes xmlns:a="http://schemas.openxmlformats.org/drawingml/2006/main" xmlns:r="http://schemas.openxmlformats.org/officeDocument/2006/relationships" xmlns:p="http://schemas.openxmlformats.org/presentationml/2006/main">
+  <p:cSld>
+    <p:spTree>
+      <p:nvGrpSpPr>
+        <p:cNvPr id="1" name=""/>
+        <p:cNvGrpSpPr/>
+        <p:nvPr/>
+      </p:nvGrpSpPr>
+      <p:grpSpPr>
+        <a:xfrm>
+          <a:off x="0" y="0"/>
+          <a:ext cx="0" cy="0"/>
+          <a:chOff x="0" y="0"/>
+          <a:chExt cx="0" cy="0"/>
+        </a:xfrm>
+      </p:grpSpPr>
+      <p:sp>
+        <p:nvSpPr>
+          <p:cNvPr id="2" name="Slide Image Placeholder 1"/>
+          <p:cNvSpPr>
+            <a:spLocks noGrp="1" noRot="1" noChangeAspect="1"/>
+          </p:cNvSpPr>
+          <p:nvPr>
+            <p:ph type="sldImg"/>
+          </p:nvPr>
+        </p:nvSpPr>
+        <p:spPr/>
+      </p:sp>
+      <p:sp>
+        <p:nvSpPr>
+          <p:cNvPr id="3" name="Notes Placeholder 2"/>
+          <p:cNvSpPr>
+            <a:spLocks noGrp="1"/>
+          </p:cNvSpPr>
+          <p:nvPr>
+            <p:ph type="body" idx="1"/>
+          </p:nvPr>
+        </p:nvSpPr>
+        <p:spPr/>
+        <p:txBody>
+          <a:bodyPr/>
+          <a:lstStyle/>
+          <a:p>
+            <a:r>
+              <a:rPr lang="en-US" dirty="0"/>
+              <a:t/>
+            </a:r>
+            <a:endParaRPr lang="en-US" dirty="0"/>
+          </a:p>
+        </p:txBody>
+      </p:sp>
+      <p:sp>
+        <p:nvSpPr>
+          <p:cNvPr id="4" name="Slide Number Placeholder 3"/>
+          <p:cNvSpPr>
+            <a:spLocks noGrp="1"/>
+          </p:cNvSpPr>
+          <p:nvPr>
+            <p:ph type="sldNum" sz="quarter" idx="10"/>
+          </p:nvPr>
+        </p:nvSpPr>
+        <p:spPr/>
+        <p:txBody>
+          <a:bodyPr/>
+          <a:lstStyle/>
+          <a:p>
+            <a:fld id="{F7021451-1387-4CA6-816F-3879F97B5CBC}" type="slidenum">
+              <a:rPr lang="en-US"/>
+              <a:t>7</a:t>
+            </a:fld>
+            <a:endParaRPr lang="en-US"/>
+          </a:p>
+        </p:txBody>
+      </p:sp>
+    </p:spTree>
+    <p:extLst>
+      <p:ext uri="{BB962C8B-B14F-4D97-AF65-F5344CB8AC3E}">
+        <p14:creationId xmlns:p14="http://schemas.microsoft.com/office/powerpoint/2010/main" val="1024086991"/>
+      </p:ext>
+    </p:extLst>
+  </p:cSld>
+  <p:clrMapOvr>
+    <a:masterClrMapping/>
+  </p:clrMapOvr>
+</p:notes>
+</file>
+
+<file path=ppt/notesSlides/notesSlide8.xml><?xml version="1.0" encoding="utf-8"?>
+<p:notes xmlns:a="http://schemas.openxmlformats.org/drawingml/2006/main" xmlns:r="http://schemas.openxmlformats.org/officeDocument/2006/relationships" xmlns:p="http://schemas.openxmlformats.org/presentationml/2006/main">
+  <p:cSld>
+    <p:spTree>
+      <p:nvGrpSpPr>
+        <p:cNvPr id="1" name=""/>
+        <p:cNvGrpSpPr/>
+        <p:nvPr/>
+      </p:nvGrpSpPr>
+      <p:grpSpPr>
+        <a:xfrm>
+          <a:off x="0" y="0"/>
+          <a:ext cx="0" cy="0"/>
+          <a:chOff x="0" y="0"/>
+          <a:chExt cx="0" cy="0"/>
+        </a:xfrm>
+      </p:grpSpPr>
+      <p:sp>
+        <p:nvSpPr>
+          <p:cNvPr id="2" name="Slide Image Placeholder 1"/>
+          <p:cNvSpPr>
+            <a:spLocks noGrp="1" noRot="1" noChangeAspect="1"/>
+          </p:cNvSpPr>
+          <p:nvPr>
+            <p:ph type="sldImg"/>
+          </p:nvPr>
+        </p:nvSpPr>
+        <p:spPr/>
+      </p:sp>
+      <p:sp>
+        <p:nvSpPr>
+          <p:cNvPr id="3" name="Notes Placeholder 2"/>
+          <p:cNvSpPr>
+            <a:spLocks noGrp="1"/>
+          </p:cNvSpPr>
+          <p:nvPr>
+            <p:ph type="body" idx="1"/>
+          </p:nvPr>
+        </p:nvSpPr>
+        <p:spPr/>
+        <p:txBody>
+          <a:bodyPr/>
+          <a:lstStyle/>
+          <a:p>
+            <a:r>
+              <a:rPr lang="en-US" dirty="0"/>
+              <a:t/>
+            </a:r>
+            <a:endParaRPr lang="en-US" dirty="0"/>
+          </a:p>
+        </p:txBody>
+      </p:sp>
+      <p:sp>
+        <p:nvSpPr>
+          <p:cNvPr id="4" name="Slide Number Placeholder 3"/>
+          <p:cNvSpPr>
+            <a:spLocks noGrp="1"/>
+          </p:cNvSpPr>
+          <p:nvPr>
+            <p:ph type="sldNum" sz="quarter" idx="10"/>
+          </p:nvPr>
+        </p:nvSpPr>
+        <p:spPr/>
+        <p:txBody>
+          <a:bodyPr/>
+          <a:lstStyle/>
+          <a:p>
+            <a:fld id="{F7021451-1387-4CA6-816F-3879F97B5CBC}" type="slidenum">
+              <a:rPr lang="en-US"/>
+              <a:t>8</a:t>
+            </a:fld>
+            <a:endParaRPr lang="en-US"/>
+          </a:p>
+        </p:txBody>
+      </p:sp>
+    </p:spTree>
+    <p:extLst>
+      <p:ext uri="{BB962C8B-B14F-4D97-AF65-F5344CB8AC3E}">
+        <p14:creationId xmlns:p14="http://schemas.microsoft.com/office/powerpoint/2010/main" val="1024086991"/>
+      </p:ext>
+    </p:extLst>
+  </p:cSld>
+  <p:clrMapOvr>
+    <a:masterClrMapping/>
+  </p:clrMapOvr>
+</p:notes>
+</file>
+
+<file path=ppt/notesSlides/notesSlide9.xml><?xml version="1.0" encoding="utf-8"?>
+<p:notes xmlns:a="http://schemas.openxmlformats.org/drawingml/2006/main" xmlns:r="http://schemas.openxmlformats.org/officeDocument/2006/relationships" xmlns:p="http://schemas.openxmlformats.org/presentationml/2006/main">
+  <p:cSld>
+    <p:spTree>
+      <p:nvGrpSpPr>
+        <p:cNvPr id="1" name=""/>
+        <p:cNvGrpSpPr/>
+        <p:nvPr/>
+      </p:nvGrpSpPr>
+      <p:grpSpPr>
+        <a:xfrm>
+          <a:off x="0" y="0"/>
+          <a:ext cx="0" cy="0"/>
+          <a:chOff x="0" y="0"/>
+          <a:chExt cx="0" cy="0"/>
+        </a:xfrm>
+      </p:grpSpPr>
+      <p:sp>
+        <p:nvSpPr>
+          <p:cNvPr id="2" name="Slide Image Placeholder 1"/>
+          <p:cNvSpPr>
+            <a:spLocks noGrp="1" noRot="1" noChangeAspect="1"/>
+          </p:cNvSpPr>
+          <p:nvPr>
+            <p:ph type="sldImg"/>
+          </p:nvPr>
+        </p:nvSpPr>
+        <p:spPr/>
+      </p:sp>
+      <p:sp>
+        <p:nvSpPr>
+          <p:cNvPr id="3" name="Notes Placeholder 2"/>
+          <p:cNvSpPr>
+            <a:spLocks noGrp="1"/>
+          </p:cNvSpPr>
+          <p:nvPr>
+            <p:ph type="body" idx="1"/>
+          </p:nvPr>
+        </p:nvSpPr>
+        <p:spPr/>
+        <p:txBody>
+          <a:bodyPr/>
+          <a:lstStyle/>
+          <a:p>
+            <a:r>
+              <a:rPr lang="en-US" dirty="0"/>
+              <a:t/>
+            </a:r>
+            <a:endParaRPr lang="en-US" dirty="0"/>
+          </a:p>
+        </p:txBody>
+      </p:sp>
+      <p:sp>
+        <p:nvSpPr>
+          <p:cNvPr id="4" name="Slide Number Placeholder 3"/>
+          <p:cNvSpPr>
+            <a:spLocks noGrp="1"/>
+          </p:cNvSpPr>
+          <p:nvPr>
+            <p:ph type="sldNum" sz="quarter" idx="10"/>
+          </p:nvPr>
+        </p:nvSpPr>
+        <p:spPr/>
+        <p:txBody>
+          <a:bodyPr/>
+          <a:lstStyle/>
+          <a:p>
+            <a:fld id="{F7021451-1387-4CA6-816F-3879F97B5CBC}" type="slidenum">
+              <a:rPr lang="en-US"/>
+              <a:t>9</a:t>
+            </a:fld>
+            <a:endParaRPr lang="en-US"/>
+          </a:p>
+        </p:txBody>
+      </p:sp>
+    </p:spTree>
+    <p:extLst>
+      <p:ext uri="{BB962C8B-B14F-4D97-AF65-F5344CB8AC3E}">
+        <p14:creationId xmlns:p14="http://schemas.microsoft.com/office/powerpoint/2010/main" val="1024086991"/>
+      </p:ext>
+    </p:extLst>
+  </p:cSld>
+  <p:clrMapOvr>
+    <a:masterClrMapping/>
+  </p:clrMapOvr>
+</p:notes>
 </file>
 
 <file path=ppt/slideLayouts/slideLayout1.xml><?xml version="1.0" encoding="utf-8"?>
@@ -1958,16 +3277,960 @@
 </p:sld>
 </file>
 
-<file path=ppt/slides/slide5.xml><?xml version="1.0" encoding="UTF-8" standalone="yes"?>
-<p:sld xmlns:a="http://schemas.openxmlformats.org/drawingml/2006/main" xmlns:r="http://schemas.openxmlformats.org/officeDocument/2006/relationships" xmlns:p="http://schemas.openxmlformats.org/presentationml/2006/main"><p:cSld name="Xanh hoá & phát triển bền vững"><p:bg><p:bgPr><a:solidFill><a:srgbClr val="FAF8F2"/></a:solidFill><a:effectLst/></p:bgPr></p:bg><p:spTree><p:nvGrpSpPr><p:cNvPr id="1" name=""/><p:cNvGrpSpPr/><p:nvPr/></p:nvGrpSpPr><p:grpSpPr><a:xfrm><a:off x="0" y="0"/><a:ext cx="0" cy="0"/><a:chOff x="0" y="0"/><a:chExt cx="0" cy="0"/></a:xfrm></p:grpSpPr><p:sp><p:nvSpPr><p:cNvPr id="2" name="Shape 2"/><p:cNvSpPr/><p:nvPr/></p:nvSpPr><p:spPr><a:xfrm><a:off x="0" y="0"/><a:ext cx="12192000" cy="1143000"/></a:xfrm><a:prstGeom prst="rect"><a:avLst/></a:prstGeom><a:solidFill><a:srgbClr val="0E3B2E"/></a:solidFill><a:ln/></p:spPr><p:txBody><a:bodyPr/><a:lstStyle/><a:p><a:pPr><a:buNone/></a:pPr><a:endParaRPr lang="vi-VN"/></a:p></p:txBody></p:sp><p:sp><p:nvSpPr><p:cNvPr id="3" name="Text 3"/><p:cNvSpPr/><p:nvPr/></p:nvSpPr><p:spPr><a:xfrm><a:off x="838200" y="228600"/><a:ext cx="1000000" cy="500000"/></a:xfrm><a:prstGeom prst="rect"><a:avLst/></a:prstGeom><a:noFill/><a:ln/></p:spPr><p:txBody><a:bodyPr wrap="square" rtlCol="0" anchor="t"><a:normAutofit/></a:bodyPr><a:lstStyle/><a:p><a:pPr algn="l" marL="0" indent="0"><a:buNone/></a:pPr><a:r><a:rPr lang="vi-VN" sz="2400" b="1" dirty="0"><a:solidFill><a:srgbClr val="D9A441"/></a:solidFill><a:latin typeface="Cambria" pitchFamily="34" charset="0"/><a:ea typeface="Cambria" pitchFamily="34" charset="-122"/><a:cs typeface="Cambria" pitchFamily="34" charset="-120"/></a:rPr><a:t>03</a:t></a:r></a:p></p:txBody></p:sp><p:sp><p:nvSpPr><p:cNvPr id="4" name="Text 4"/><p:cNvSpPr/><p:nvPr/></p:nvSpPr><p:spPr><a:xfrm><a:off x="1638300" y="274320"/><a:ext cx="9715500" cy="600000"/></a:xfrm><a:prstGeom prst="rect"><a:avLst/></a:prstGeom><a:noFill/><a:ln/></p:spPr><p:txBody><a:bodyPr wrap="square" rtlCol="0" anchor="t"><a:normAutofit/></a:bodyPr><a:lstStyle/><a:p><a:pPr algn="l" marL="0" indent="0"><a:buNone/></a:pPr><a:r><a:rPr lang="vi-VN" sz="2200" b="1" dirty="0"><a:solidFill><a:srgbClr val="FFFFFF"/></a:solidFill><a:latin typeface="Cambria" pitchFamily="34" charset="0"/><a:ea typeface="Cambria" pitchFamily="34" charset="-122"/><a:cs typeface="Cambria" pitchFamily="34" charset="-120"/></a:rPr><a:t>Xanh hoá &amp; phát triển bền vững</a:t></a:r></a:p></p:txBody></p:sp><p:sp><p:nvSpPr><p:cNvPr id="5" name="Text 5"/><p:cNvSpPr/><p:nvPr/></p:nvSpPr><p:spPr><a:xfrm><a:off x="838200" y="1524000"/><a:ext cx="10515600" cy="3200000"/></a:xfrm><a:prstGeom prst="rect"><a:avLst/></a:prstGeom><a:noFill/><a:ln/></p:spPr><p:txBody><a:bodyPr wrap="square" rtlCol="0" anchor="t"><a:normAutofit/></a:bodyPr><a:lstStyle/><a:p><a:pPr algn="l" marL="216000" indent="-216000"><a:buFont typeface="Arial" pitchFamily="34" charset="0"/><a:buChar char="&#8226;"/></a:pPr><a:r><a:rPr lang="vi-VN" sz="1400" dirty="0"><a:solidFill><a:srgbClr val="1F2A24"/></a:solidFill><a:latin typeface="Calibri" pitchFamily="34" charset="0"/><a:ea typeface="Calibri" pitchFamily="34" charset="-122"/><a:cs typeface="Calibri" pitchFamily="34" charset="-120"/></a:rPr><a:t>Ưu tiên du lịch xanh: giảm rác nhựa, tiết kiệm năng lượng tại điểm đến.</a:t></a:r></a:p><a:p><a:pPr algn="l" marL="216000" indent="-216000"><a:spcBef><a:spcPts val="900"/></a:spcBef><a:buFont typeface="Arial" pitchFamily="34" charset="0"/><a:buChar char="&#8226;"/></a:pPr><a:r><a:rPr lang="vi-VN" sz="1400" dirty="0"><a:solidFill><a:srgbClr val="1F2A24"/></a:solidFill><a:latin typeface="Calibri" pitchFamily="34" charset="0"/><a:ea typeface="Calibri" pitchFamily="34" charset="-122"/><a:cs typeface="Calibri" pitchFamily="34" charset="-120"/></a:rPr><a:t>Kiểm soát sức chứa ở nơi nhạy cảm như Côn Đảo, rừng ngập mặn Cần Giờ để không làm tổn hại hệ sinh thái.</a:t></a:r></a:p><a:p><a:pPr algn="l" marL="216000" indent="-216000"><a:spcBef><a:spcPts val="900"/></a:spcBef><a:buFont typeface="Arial" pitchFamily="34" charset="0"/><a:buChar char="&#8226;"/></a:pPr><a:r><a:rPr lang="vi-VN" sz="1400" dirty="0"><a:solidFill><a:srgbClr val="1F2A24"/></a:solidFill><a:latin typeface="Calibri" pitchFamily="34" charset="0"/><a:ea typeface="Calibri" pitchFamily="34" charset="-122"/><a:cs typeface="Calibri" pitchFamily="34" charset="-120"/></a:rPr><a:t>Tôn trọng giá trị thiêng liêng của di tích lịch sử; chia sẻ lợi ích với cộng đồng địa phương.</a:t></a:r></a:p></p:txBody></p:sp><p:sp><p:nvSpPr><p:cNvPr id="6" name="Shape 6"/><p:cNvSpPr/><p:nvPr/></p:nvSpPr><p:spPr><a:xfrm><a:off x="838200" y="4876800"/><a:ext cx="10515600" cy="1000000"/></a:xfrm><a:prstGeom prst="roundRect"><a:avLst><a:gd name="adj" fmla="val 4000"/></a:avLst></a:prstGeom><a:solidFill><a:srgbClr val="ECEFE1"/></a:solidFill><a:ln/></p:spPr><p:txBody><a:bodyPr/><a:lstStyle/><a:p><a:pPr><a:buNone/></a:pPr><a:endParaRPr lang="vi-VN"/></a:p></p:txBody></p:sp><p:sp><p:nvSpPr><p:cNvPr id="7" name="Shape 7"/><p:cNvSpPr/><p:nvPr/></p:nvSpPr><p:spPr><a:xfrm><a:off x="838200" y="4876800"/><a:ext cx="45720" cy="1000000"/></a:xfrm><a:prstGeom prst="rect"><a:avLst/></a:prstGeom><a:solidFill><a:srgbClr val="D9A441"/></a:solidFill><a:ln/></p:spPr><p:txBody><a:bodyPr/><a:lstStyle/><a:p><a:pPr><a:buNone/></a:pPr><a:endParaRPr lang="vi-VN"/></a:p></p:txBody></p:sp><p:sp><p:nvSpPr><p:cNvPr id="8" name="Text 8"/><p:cNvSpPr/><p:nvPr/></p:nvSpPr><p:spPr><a:xfrm><a:off x="1021080" y="4968240"/><a:ext cx="10149840" cy="300000"/></a:xfrm><a:prstGeom prst="rect"><a:avLst/></a:prstGeom><a:noFill/><a:ln/></p:spPr><p:txBody><a:bodyPr wrap="square" rtlCol="0" anchor="t"><a:normAutofit/></a:bodyPr><a:lstStyle/><a:p><a:pPr algn="l" marL="0" indent="0"><a:buNone/></a:pPr><a:r><a:rPr lang="vi-VN" sz="1000" b="1" dirty="0"><a:solidFill><a:srgbClr val="D9A441"/></a:solidFill><a:latin typeface="Calibri" pitchFamily="34" charset="0"/><a:ea typeface="Calibri" pitchFamily="34" charset="-122"/><a:cs typeface="Calibri" pitchFamily="34" charset="-120"/></a:rPr><a:t>VÍ DỤ</a:t></a:r></a:p></p:txBody></p:sp><p:sp><p:nvSpPr><p:cNvPr id="9" name="Text 9"/><p:cNvSpPr/><p:nvPr/></p:nvSpPr><p:spPr><a:xfrm><a:off x="1021080" y="5257800"/><a:ext cx="10149840" cy="550000"/></a:xfrm><a:prstGeom prst="rect"><a:avLst/></a:prstGeom><a:noFill/><a:ln/></p:spPr><p:txBody><a:bodyPr wrap="square" rtlCol="0" anchor="t"><a:normAutofit/></a:bodyPr><a:lstStyle/><a:p><a:pPr algn="l" marL="0" indent="0"><a:buNone/></a:pPr><a:r><a:rPr lang="vi-VN" sz="1200" i="1" dirty="0"><a:solidFill><a:srgbClr val="5B6B62"/></a:solidFill><a:latin typeface="Calibri" pitchFamily="34" charset="0"/><a:ea typeface="Calibri" pitchFamily="34" charset="-122"/><a:cs typeface="Calibri" pitchFamily="34" charset="-120"/></a:rPr><a:t>Ở Côn Đảo, du khách vừa tìm hiểu lịch sử tại khu di tích nhà tù, vừa tham gia hoạt động tìm hiểu bảo tồn biển theo hướng dẫn của Vườn quốc gia — thay vì chỉ “check-in” rồi đi.</a:t></a:r></a:p></p:txBody></p:sp></p:spTree></p:cSld><p:clrMapOvr><a:masterClrMapping/></p:clrMapOvr></p:sld>
+<file path=ppt/slides/slide5.xml><?xml version="1.0" encoding="utf-8"?>
+<p:sld xmlns:a="http://schemas.openxmlformats.org/drawingml/2006/main" xmlns:r="http://schemas.openxmlformats.org/officeDocument/2006/relationships" xmlns:p="http://schemas.openxmlformats.org/presentationml/2006/main">
+  <p:cSld name="Xanh hoá &amp; phát triển bền vững">
+    <p:bg>
+      <p:bgPr>
+        <a:solidFill>
+          <a:srgbClr val="FAF8F2"/>
+        </a:solidFill>
+        <a:effectLst/>
+      </p:bgPr>
+    </p:bg>
+    <p:spTree>
+      <p:nvGrpSpPr>
+        <p:cNvPr id="1" name=""/>
+        <p:cNvGrpSpPr/>
+        <p:nvPr/>
+      </p:nvGrpSpPr>
+      <p:grpSpPr>
+        <a:xfrm>
+          <a:off x="0" y="0"/>
+          <a:ext cx="0" cy="0"/>
+          <a:chOff x="0" y="0"/>
+          <a:chExt cx="0" cy="0"/>
+        </a:xfrm>
+      </p:grpSpPr>
+      <p:sp>
+        <p:nvSpPr>
+          <p:cNvPr id="2" name="Shape 2"/>
+          <p:cNvSpPr/>
+          <p:nvPr/>
+        </p:nvSpPr>
+        <p:spPr>
+          <a:xfrm>
+            <a:off x="0" y="0"/>
+            <a:ext cx="12192000" cy="1143000"/>
+          </a:xfrm>
+          <a:prstGeom prst="rect">
+            <a:avLst/>
+          </a:prstGeom>
+          <a:solidFill>
+            <a:srgbClr val="0E3B2E"/>
+          </a:solidFill>
+          <a:ln/>
+        </p:spPr>
+        <p:txBody>
+          <a:bodyPr/>
+          <a:lstStyle/>
+          <a:p>
+            <a:pPr>
+              <a:buNone/>
+            </a:pPr>
+            <a:endParaRPr lang="vi-VN"/>
+          </a:p>
+        </p:txBody>
+      </p:sp>
+      <p:sp>
+        <p:nvSpPr>
+          <p:cNvPr id="3" name="Text 3"/>
+          <p:cNvSpPr/>
+          <p:nvPr/>
+        </p:nvSpPr>
+        <p:spPr>
+          <a:xfrm>
+            <a:off x="838200" y="228600"/>
+            <a:ext cx="1000000" cy="500000"/>
+          </a:xfrm>
+          <a:prstGeom prst="rect">
+            <a:avLst/>
+          </a:prstGeom>
+          <a:noFill/>
+          <a:ln/>
+        </p:spPr>
+        <p:txBody>
+          <a:bodyPr wrap="square" rtlCol="0" anchor="t">
+            <a:normAutofit/>
+          </a:bodyPr>
+          <a:lstStyle/>
+          <a:p>
+            <a:pPr algn="l" marL="0" indent="0">
+              <a:buNone/>
+            </a:pPr>
+            <a:r>
+              <a:rPr lang="vi-VN" sz="2400" b="1" dirty="0">
+                <a:solidFill>
+                  <a:srgbClr val="D9A441"/>
+                </a:solidFill>
+                <a:latin typeface="Cambria" pitchFamily="34" charset="0"/>
+                <a:ea typeface="Cambria" pitchFamily="34" charset="-122"/>
+                <a:cs typeface="Cambria" pitchFamily="34" charset="-120"/>
+              </a:rPr>
+              <a:t>03</a:t>
+            </a:r>
+          </a:p>
+        </p:txBody>
+      </p:sp>
+      <p:sp>
+        <p:nvSpPr>
+          <p:cNvPr id="4" name="Text 4"/>
+          <p:cNvSpPr/>
+          <p:nvPr/>
+        </p:nvSpPr>
+        <p:spPr>
+          <a:xfrm>
+            <a:off x="1638300" y="274320"/>
+            <a:ext cx="9715500" cy="600000"/>
+          </a:xfrm>
+          <a:prstGeom prst="rect">
+            <a:avLst/>
+          </a:prstGeom>
+          <a:noFill/>
+          <a:ln/>
+        </p:spPr>
+        <p:txBody>
+          <a:bodyPr wrap="square" rtlCol="0" anchor="t">
+            <a:normAutofit/>
+          </a:bodyPr>
+          <a:lstStyle/>
+          <a:p>
+            <a:pPr algn="l" marL="0" indent="0">
+              <a:buNone/>
+            </a:pPr>
+            <a:r>
+              <a:rPr lang="vi-VN" sz="2200" b="1" dirty="0">
+                <a:solidFill>
+                  <a:srgbClr val="FFFFFF"/>
+                </a:solidFill>
+                <a:latin typeface="Cambria" pitchFamily="34" charset="0"/>
+                <a:ea typeface="Cambria" pitchFamily="34" charset="-122"/>
+                <a:cs typeface="Cambria" pitchFamily="34" charset="-120"/>
+              </a:rPr>
+              <a:t>Xanh hoá &amp; phát triển bền vững</a:t>
+            </a:r>
+          </a:p>
+        </p:txBody>
+      </p:sp>
+      <p:sp>
+        <p:nvSpPr>
+          <p:cNvPr id="5" name="Text 5"/>
+          <p:cNvSpPr/>
+          <p:nvPr/>
+        </p:nvSpPr>
+        <p:spPr>
+          <a:xfrm>
+            <a:off x="838200" y="1524000"/>
+            <a:ext cx="10515600" cy="3200000"/>
+          </a:xfrm>
+          <a:prstGeom prst="rect">
+            <a:avLst/>
+          </a:prstGeom>
+          <a:noFill/>
+          <a:ln/>
+        </p:spPr>
+        <p:txBody>
+          <a:bodyPr wrap="square" rtlCol="0" anchor="t">
+            <a:normAutofit/>
+          </a:bodyPr>
+          <a:lstStyle/>
+          <a:p>
+            <a:pPr algn="l" marL="216000" indent="-216000">
+              <a:buFont typeface="Arial" pitchFamily="34" charset="0"/>
+              <a:buChar char="•"/>
+            </a:pPr>
+            <a:r>
+              <a:rPr lang="vi-VN" sz="1400" dirty="0">
+                <a:solidFill>
+                  <a:srgbClr val="1F2A24"/>
+                </a:solidFill>
+                <a:latin typeface="Calibri" pitchFamily="34" charset="0"/>
+                <a:ea typeface="Calibri" pitchFamily="34" charset="-122"/>
+                <a:cs typeface="Calibri" pitchFamily="34" charset="-120"/>
+              </a:rPr>
+              <a:t>Ưu tiên du lịch xanh: giảm rác nhựa, tiết kiệm năng lượng tại điểm đến.</a:t>
+            </a:r>
+          </a:p>
+          <a:p>
+            <a:pPr algn="l" marL="216000" indent="-216000">
+              <a:spcBef>
+                <a:spcPts val="900"/>
+              </a:spcBef>
+              <a:buFont typeface="Arial" pitchFamily="34" charset="0"/>
+              <a:buChar char="•"/>
+            </a:pPr>
+            <a:r>
+              <a:rPr lang="vi-VN" sz="1400" dirty="0">
+                <a:solidFill>
+                  <a:srgbClr val="1F2A24"/>
+                </a:solidFill>
+                <a:latin typeface="Calibri" pitchFamily="34" charset="0"/>
+                <a:ea typeface="Calibri" pitchFamily="34" charset="-122"/>
+                <a:cs typeface="Calibri" pitchFamily="34" charset="-120"/>
+              </a:rPr>
+              <a:t>Kiểm soát sức chứa ở nơi nhạy cảm như Côn Đảo, rừng ngập mặn Cần Giờ để không làm tổn hại hệ sinh thái.</a:t>
+            </a:r>
+          </a:p>
+          <a:p>
+            <a:pPr algn="l" marL="216000" indent="-216000">
+              <a:spcBef>
+                <a:spcPts val="900"/>
+              </a:spcBef>
+              <a:buFont typeface="Arial" pitchFamily="34" charset="0"/>
+              <a:buChar char="•"/>
+            </a:pPr>
+            <a:r>
+              <a:rPr lang="vi-VN" sz="1400" dirty="0">
+                <a:solidFill>
+                  <a:srgbClr val="1F2A24"/>
+                </a:solidFill>
+                <a:latin typeface="Calibri" pitchFamily="34" charset="0"/>
+                <a:ea typeface="Calibri" pitchFamily="34" charset="-122"/>
+                <a:cs typeface="Calibri" pitchFamily="34" charset="-120"/>
+              </a:rPr>
+              <a:t>Tôn trọng giá trị thiêng liêng của di tích lịch sử; chia sẻ lợi ích với cộng đồng địa phương.</a:t>
+            </a:r>
+          </a:p>
+        </p:txBody>
+      </p:sp>
+      <p:sp>
+        <p:nvSpPr>
+          <p:cNvPr id="6" name="Shape 6"/>
+          <p:cNvSpPr/>
+          <p:nvPr/>
+        </p:nvSpPr>
+        <p:spPr>
+          <a:xfrm>
+            <a:off x="838200" y="4876800"/>
+            <a:ext cx="10515600" cy="1000000"/>
+          </a:xfrm>
+          <a:prstGeom prst="roundRect">
+            <a:avLst>
+              <a:gd name="adj" fmla="val 4000"/>
+            </a:avLst>
+          </a:prstGeom>
+          <a:solidFill>
+            <a:srgbClr val="ECEFE1"/>
+          </a:solidFill>
+          <a:ln/>
+        </p:spPr>
+        <p:txBody>
+          <a:bodyPr/>
+          <a:lstStyle/>
+          <a:p>
+            <a:pPr>
+              <a:buNone/>
+            </a:pPr>
+            <a:endParaRPr lang="vi-VN"/>
+          </a:p>
+        </p:txBody>
+      </p:sp>
+      <p:sp>
+        <p:nvSpPr>
+          <p:cNvPr id="7" name="Shape 7"/>
+          <p:cNvSpPr/>
+          <p:nvPr/>
+        </p:nvSpPr>
+        <p:spPr>
+          <a:xfrm>
+            <a:off x="838200" y="4876800"/>
+            <a:ext cx="45720" cy="1000000"/>
+          </a:xfrm>
+          <a:prstGeom prst="rect">
+            <a:avLst/>
+          </a:prstGeom>
+          <a:solidFill>
+            <a:srgbClr val="D9A441"/>
+          </a:solidFill>
+          <a:ln/>
+        </p:spPr>
+        <p:txBody>
+          <a:bodyPr/>
+          <a:lstStyle/>
+          <a:p>
+            <a:pPr>
+              <a:buNone/>
+            </a:pPr>
+            <a:endParaRPr lang="vi-VN"/>
+          </a:p>
+        </p:txBody>
+      </p:sp>
+      <p:sp>
+        <p:nvSpPr>
+          <p:cNvPr id="8" name="Text 8"/>
+          <p:cNvSpPr/>
+          <p:nvPr/>
+        </p:nvSpPr>
+        <p:spPr>
+          <a:xfrm>
+            <a:off x="1021080" y="4968240"/>
+            <a:ext cx="10149840" cy="300000"/>
+          </a:xfrm>
+          <a:prstGeom prst="rect">
+            <a:avLst/>
+          </a:prstGeom>
+          <a:noFill/>
+          <a:ln/>
+        </p:spPr>
+        <p:txBody>
+          <a:bodyPr wrap="square" rtlCol="0" anchor="t">
+            <a:normAutofit/>
+          </a:bodyPr>
+          <a:lstStyle/>
+          <a:p>
+            <a:pPr algn="l" marL="0" indent="0">
+              <a:buNone/>
+            </a:pPr>
+            <a:r>
+              <a:rPr lang="vi-VN" sz="1000" b="1" dirty="0">
+                <a:solidFill>
+                  <a:srgbClr val="D9A441"/>
+                </a:solidFill>
+                <a:latin typeface="Calibri" pitchFamily="34" charset="0"/>
+                <a:ea typeface="Calibri" pitchFamily="34" charset="-122"/>
+                <a:cs typeface="Calibri" pitchFamily="34" charset="-120"/>
+              </a:rPr>
+              <a:t>VÍ DỤ</a:t>
+            </a:r>
+          </a:p>
+        </p:txBody>
+      </p:sp>
+      <p:sp>
+        <p:nvSpPr>
+          <p:cNvPr id="9" name="Text 9"/>
+          <p:cNvSpPr/>
+          <p:nvPr/>
+        </p:nvSpPr>
+        <p:spPr>
+          <a:xfrm>
+            <a:off x="1021080" y="5257800"/>
+            <a:ext cx="10149840" cy="550000"/>
+          </a:xfrm>
+          <a:prstGeom prst="rect">
+            <a:avLst/>
+          </a:prstGeom>
+          <a:noFill/>
+          <a:ln/>
+        </p:spPr>
+        <p:txBody>
+          <a:bodyPr wrap="square" rtlCol="0" anchor="t">
+            <a:normAutofit/>
+          </a:bodyPr>
+          <a:lstStyle/>
+          <a:p>
+            <a:pPr algn="l" marL="0" indent="0">
+              <a:buNone/>
+            </a:pPr>
+            <a:r>
+              <a:rPr lang="vi-VN" sz="1200" i="1" dirty="0">
+                <a:solidFill>
+                  <a:srgbClr val="5B6B62"/>
+                </a:solidFill>
+                <a:latin typeface="Calibri" pitchFamily="34" charset="0"/>
+                <a:ea typeface="Calibri" pitchFamily="34" charset="-122"/>
+                <a:cs typeface="Calibri" pitchFamily="34" charset="-120"/>
+              </a:rPr>
+              <a:t>Ở Côn Đảo, du khách vừa tìm hiểu lịch sử tại khu di tích nhà tù, vừa tham gia hoạt động tìm hiểu bảo tồn biển theo hướng dẫn của Vườn quốc gia — thay vì chỉ “check-in” rồi đi.</a:t>
+            </a:r>
+          </a:p>
+        </p:txBody>
+      </p:sp>
+    </p:spTree>
+  </p:cSld>
+  <p:clrMapOvr>
+    <a:masterClrMapping/>
+  </p:clrMapOvr>
+</p:sld>
 </file>
 
-<file path=ppt/slides/slide6.xml><?xml version="1.0" encoding="UTF-8" standalone="yes"?>
-<p:sld xmlns:a="http://schemas.openxmlformats.org/drawingml/2006/main" xmlns:r="http://schemas.openxmlformats.org/officeDocument/2006/relationships" xmlns:p="http://schemas.openxmlformats.org/presentationml/2006/main"><p:cSld name="Du lịch thông minh & liên kết vùng"><p:bg><p:bgPr><a:solidFill><a:srgbClr val="FAF8F2"/></a:solidFill><a:effectLst/></p:bgPr></p:bg><p:spTree><p:nvGrpSpPr><p:cNvPr id="1" name=""/><p:cNvGrpSpPr/><p:nvPr/></p:nvGrpSpPr><p:grpSpPr><a:xfrm><a:off x="0" y="0"/><a:ext cx="0" cy="0"/><a:chOff x="0" y="0"/><a:chExt cx="0" cy="0"/></a:xfrm></p:grpSpPr><p:sp><p:nvSpPr><p:cNvPr id="2" name="Shape 2"/><p:cNvSpPr/><p:nvPr/></p:nvSpPr><p:spPr><a:xfrm><a:off x="0" y="0"/><a:ext cx="12192000" cy="1143000"/></a:xfrm><a:prstGeom prst="rect"><a:avLst/></a:prstGeom><a:solidFill><a:srgbClr val="0E3B2E"/></a:solidFill><a:ln/></p:spPr><p:txBody><a:bodyPr/><a:lstStyle/><a:p><a:pPr><a:buNone/></a:pPr><a:endParaRPr lang="vi-VN"/></a:p></p:txBody></p:sp><p:sp><p:nvSpPr><p:cNvPr id="3" name="Text 3"/><p:cNvSpPr/><p:nvPr/></p:nvSpPr><p:spPr><a:xfrm><a:off x="838200" y="228600"/><a:ext cx="1000000" cy="500000"/></a:xfrm><a:prstGeom prst="rect"><a:avLst/></a:prstGeom><a:noFill/><a:ln/></p:spPr><p:txBody><a:bodyPr wrap="square" rtlCol="0" anchor="t"><a:normAutofit/></a:bodyPr><a:lstStyle/><a:p><a:pPr algn="l" marL="0" indent="0"><a:buNone/></a:pPr><a:r><a:rPr lang="vi-VN" sz="2400" b="1" dirty="0"><a:solidFill><a:srgbClr val="D9A441"/></a:solidFill><a:latin typeface="Cambria" pitchFamily="34" charset="0"/><a:ea typeface="Cambria" pitchFamily="34" charset="-122"/><a:cs typeface="Cambria" pitchFamily="34" charset="-120"/></a:rPr><a:t>04</a:t></a:r></a:p></p:txBody></p:sp><p:sp><p:nvSpPr><p:cNvPr id="4" name="Text 4"/><p:cNvSpPr/><p:nvPr/></p:nvSpPr><p:spPr><a:xfrm><a:off x="1638300" y="274320"/><a:ext cx="9715500" cy="600000"/></a:xfrm><a:prstGeom prst="rect"><a:avLst/></a:prstGeom><a:noFill/><a:ln/></p:spPr><p:txBody><a:bodyPr wrap="square" rtlCol="0" anchor="t"><a:normAutofit/></a:bodyPr><a:lstStyle/><a:p><a:pPr algn="l" marL="0" indent="0"><a:buNone/></a:pPr><a:r><a:rPr lang="vi-VN" sz="2200" b="1" dirty="0"><a:solidFill><a:srgbClr val="FFFFFF"/></a:solidFill><a:latin typeface="Cambria" pitchFamily="34" charset="0"/><a:ea typeface="Cambria" pitchFamily="34" charset="-122"/><a:cs typeface="Cambria" pitchFamily="34" charset="-120"/></a:rPr><a:t>Du lịch thông minh &amp; liên kết vùng</a:t></a:r></a:p></p:txBody></p:sp><p:sp><p:nvSpPr><p:cNvPr id="5" name="Text 5"/><p:cNvSpPr/><p:nvPr/></p:nvSpPr><p:spPr><a:xfrm><a:off x="838200" y="1524000"/><a:ext cx="10515600" cy="3200000"/></a:xfrm><a:prstGeom prst="rect"><a:avLst/></a:prstGeom><a:noFill/><a:ln/></p:spPr><p:txBody><a:bodyPr wrap="square" rtlCol="0" anchor="t"><a:normAutofit/></a:bodyPr><a:lstStyle/><a:p><a:pPr algn="l" marL="216000" indent="-216000"><a:buFont typeface="Arial" pitchFamily="34" charset="0"/><a:buChar char="&#8226;"/></a:pPr><a:r><a:rPr lang="vi-VN" sz="1400" dirty="0"><a:solidFill><a:srgbClr val="1F2A24"/></a:solidFill><a:latin typeface="Calibri" pitchFamily="34" charset="0"/><a:ea typeface="Calibri" pitchFamily="34" charset="-122"/><a:cs typeface="Calibri" pitchFamily="34" charset="-120"/></a:rPr><a:t>Chuyển đổi số: bản đồ số, vé điện tử, thuyết minh tự động, dữ liệu dự báo lượng khách, gợi ý lịch trình.</a:t></a:r></a:p><a:p><a:pPr algn="l" marL="216000" indent="-216000"><a:spcBef><a:spcPts val="900"/></a:spcBef><a:buFont typeface="Arial" pitchFamily="34" charset="0"/><a:buChar char="&#8226;"/></a:pPr><a:r><a:rPr lang="vi-VN" sz="1400" dirty="0"><a:solidFill><a:srgbClr val="1F2A24"/></a:solidFill><a:latin typeface="Calibri" pitchFamily="34" charset="0"/><a:ea typeface="Calibri" pitchFamily="34" charset="-122"/><a:cs typeface="Calibri" pitchFamily="34" charset="-120"/></a:rPr><a:t>Giao thông kết nối: metro (tuyến số 1 Bến Thành – Suối Tiên chạy từ 12/2024), buýt đường sông, tàu cao tốc ra biển – đảo.</a:t></a:r></a:p><a:p><a:pPr algn="l" marL="216000" indent="-216000"><a:spcBef><a:spcPts val="900"/></a:spcBef><a:buFont typeface="Arial" pitchFamily="34" charset="0"/><a:buChar char="&#8226;"/></a:pPr><a:r><a:rPr lang="vi-VN" sz="1400" dirty="0"><a:solidFill><a:srgbClr val="1F2A24"/></a:solidFill><a:latin typeface="Calibri" pitchFamily="34" charset="0"/><a:ea typeface="Calibri" pitchFamily="34" charset="-122"/><a:cs typeface="Calibri" pitchFamily="34" charset="-120"/></a:rPr><a:t>Liên kết với các tỉnh Đông Nam Bộ, Đồng bằng sông Cửu Long và cả nước để tạo tuyến du lịch dài ngày.</a:t></a:r></a:p></p:txBody></p:sp></p:spTree></p:cSld><p:clrMapOvr><a:masterClrMapping/></p:clrMapOvr></p:sld>
+<file path=ppt/slides/slide6.xml><?xml version="1.0" encoding="utf-8"?>
+<p:sld xmlns:a="http://schemas.openxmlformats.org/drawingml/2006/main" xmlns:r="http://schemas.openxmlformats.org/officeDocument/2006/relationships" xmlns:p="http://schemas.openxmlformats.org/presentationml/2006/main">
+  <p:cSld name="Du lịch thông minh &amp; liên kết vùng">
+    <p:bg>
+      <p:bgPr>
+        <a:solidFill>
+          <a:srgbClr val="FAF8F2"/>
+        </a:solidFill>
+        <a:effectLst/>
+      </p:bgPr>
+    </p:bg>
+    <p:spTree>
+      <p:nvGrpSpPr>
+        <p:cNvPr id="1" name=""/>
+        <p:cNvGrpSpPr/>
+        <p:nvPr/>
+      </p:nvGrpSpPr>
+      <p:grpSpPr>
+        <a:xfrm>
+          <a:off x="0" y="0"/>
+          <a:ext cx="0" cy="0"/>
+          <a:chOff x="0" y="0"/>
+          <a:chExt cx="0" cy="0"/>
+        </a:xfrm>
+      </p:grpSpPr>
+      <p:sp>
+        <p:nvSpPr>
+          <p:cNvPr id="2" name="Shape 2"/>
+          <p:cNvSpPr/>
+          <p:nvPr/>
+        </p:nvSpPr>
+        <p:spPr>
+          <a:xfrm>
+            <a:off x="0" y="0"/>
+            <a:ext cx="12192000" cy="1143000"/>
+          </a:xfrm>
+          <a:prstGeom prst="rect">
+            <a:avLst/>
+          </a:prstGeom>
+          <a:solidFill>
+            <a:srgbClr val="0E3B2E"/>
+          </a:solidFill>
+          <a:ln/>
+        </p:spPr>
+        <p:txBody>
+          <a:bodyPr/>
+          <a:lstStyle/>
+          <a:p>
+            <a:pPr>
+              <a:buNone/>
+            </a:pPr>
+            <a:endParaRPr lang="vi-VN"/>
+          </a:p>
+        </p:txBody>
+      </p:sp>
+      <p:sp>
+        <p:nvSpPr>
+          <p:cNvPr id="3" name="Text 3"/>
+          <p:cNvSpPr/>
+          <p:nvPr/>
+        </p:nvSpPr>
+        <p:spPr>
+          <a:xfrm>
+            <a:off x="838200" y="228600"/>
+            <a:ext cx="1000000" cy="500000"/>
+          </a:xfrm>
+          <a:prstGeom prst="rect">
+            <a:avLst/>
+          </a:prstGeom>
+          <a:noFill/>
+          <a:ln/>
+        </p:spPr>
+        <p:txBody>
+          <a:bodyPr wrap="square" rtlCol="0" anchor="t">
+            <a:normAutofit/>
+          </a:bodyPr>
+          <a:lstStyle/>
+          <a:p>
+            <a:pPr algn="l" marL="0" indent="0">
+              <a:buNone/>
+            </a:pPr>
+            <a:r>
+              <a:rPr lang="vi-VN" sz="2400" b="1" dirty="0">
+                <a:solidFill>
+                  <a:srgbClr val="D9A441"/>
+                </a:solidFill>
+                <a:latin typeface="Cambria" pitchFamily="34" charset="0"/>
+                <a:ea typeface="Cambria" pitchFamily="34" charset="-122"/>
+                <a:cs typeface="Cambria" pitchFamily="34" charset="-120"/>
+              </a:rPr>
+              <a:t>04</a:t>
+            </a:r>
+          </a:p>
+        </p:txBody>
+      </p:sp>
+      <p:sp>
+        <p:nvSpPr>
+          <p:cNvPr id="4" name="Text 4"/>
+          <p:cNvSpPr/>
+          <p:nvPr/>
+        </p:nvSpPr>
+        <p:spPr>
+          <a:xfrm>
+            <a:off x="1638300" y="274320"/>
+            <a:ext cx="9715500" cy="600000"/>
+          </a:xfrm>
+          <a:prstGeom prst="rect">
+            <a:avLst/>
+          </a:prstGeom>
+          <a:noFill/>
+          <a:ln/>
+        </p:spPr>
+        <p:txBody>
+          <a:bodyPr wrap="square" rtlCol="0" anchor="t">
+            <a:normAutofit/>
+          </a:bodyPr>
+          <a:lstStyle/>
+          <a:p>
+            <a:pPr algn="l" marL="0" indent="0">
+              <a:buNone/>
+            </a:pPr>
+            <a:r>
+              <a:rPr lang="vi-VN" sz="2200" b="1" dirty="0">
+                <a:solidFill>
+                  <a:srgbClr val="FFFFFF"/>
+                </a:solidFill>
+                <a:latin typeface="Cambria" pitchFamily="34" charset="0"/>
+                <a:ea typeface="Cambria" pitchFamily="34" charset="-122"/>
+                <a:cs typeface="Cambria" pitchFamily="34" charset="-120"/>
+              </a:rPr>
+              <a:t>Du lịch thông minh &amp; liên kết vùng</a:t>
+            </a:r>
+          </a:p>
+        </p:txBody>
+      </p:sp>
+      <p:sp>
+        <p:nvSpPr>
+          <p:cNvPr id="5" name="Text 5"/>
+          <p:cNvSpPr/>
+          <p:nvPr/>
+        </p:nvSpPr>
+        <p:spPr>
+          <a:xfrm>
+            <a:off x="838200" y="1524000"/>
+            <a:ext cx="10515600" cy="3200000"/>
+          </a:xfrm>
+          <a:prstGeom prst="rect">
+            <a:avLst/>
+          </a:prstGeom>
+          <a:noFill/>
+          <a:ln/>
+        </p:spPr>
+        <p:txBody>
+          <a:bodyPr wrap="square" rtlCol="0" anchor="t">
+            <a:normAutofit/>
+          </a:bodyPr>
+          <a:lstStyle/>
+          <a:p>
+            <a:pPr algn="l" marL="216000" indent="-216000">
+              <a:buFont typeface="Arial" pitchFamily="34" charset="0"/>
+              <a:buChar char="•"/>
+            </a:pPr>
+            <a:r>
+              <a:rPr lang="vi-VN" sz="1400" dirty="0">
+                <a:solidFill>
+                  <a:srgbClr val="1F2A24"/>
+                </a:solidFill>
+                <a:latin typeface="Calibri" pitchFamily="34" charset="0"/>
+                <a:ea typeface="Calibri" pitchFamily="34" charset="-122"/>
+                <a:cs typeface="Calibri" pitchFamily="34" charset="-120"/>
+              </a:rPr>
+              <a:t>Chuyển đổi số: bản đồ số, vé điện tử, thuyết minh tự động, dữ liệu dự báo lượng khách, gợi ý lịch trình.</a:t>
+            </a:r>
+          </a:p>
+          <a:p>
+            <a:pPr algn="l" marL="216000" indent="-216000">
+              <a:spcBef>
+                <a:spcPts val="900"/>
+              </a:spcBef>
+              <a:buFont typeface="Arial" pitchFamily="34" charset="0"/>
+              <a:buChar char="•"/>
+            </a:pPr>
+            <a:r>
+              <a:rPr lang="vi-VN" sz="1400" dirty="0">
+                <a:solidFill>
+                  <a:srgbClr val="1F2A24"/>
+                </a:solidFill>
+                <a:latin typeface="Calibri" pitchFamily="34" charset="0"/>
+                <a:ea typeface="Calibri" pitchFamily="34" charset="-122"/>
+                <a:cs typeface="Calibri" pitchFamily="34" charset="-120"/>
+              </a:rPr>
+              <a:t>Giao thông kết nối: metro (tuyến số 1 Bến Thành – Suối Tiên chạy từ 12/2024), buýt đường sông, tàu cao tốc ra biển – đảo.</a:t>
+            </a:r>
+          </a:p>
+          <a:p>
+            <a:pPr algn="l" marL="216000" indent="-216000">
+              <a:spcBef>
+                <a:spcPts val="900"/>
+              </a:spcBef>
+              <a:buFont typeface="Arial" pitchFamily="34" charset="0"/>
+              <a:buChar char="•"/>
+            </a:pPr>
+            <a:r>
+              <a:rPr lang="vi-VN" sz="1400" dirty="0">
+                <a:solidFill>
+                  <a:srgbClr val="1F2A24"/>
+                </a:solidFill>
+                <a:latin typeface="Calibri" pitchFamily="34" charset="0"/>
+                <a:ea typeface="Calibri" pitchFamily="34" charset="-122"/>
+                <a:cs typeface="Calibri" pitchFamily="34" charset="-120"/>
+              </a:rPr>
+              <a:t>Liên kết với các tỉnh Đông Nam Bộ, Đồng bằng sông Cửu Long và cả nước để tạo tuyến du lịch dài ngày.</a:t>
+            </a:r>
+          </a:p>
+        </p:txBody>
+      </p:sp>
+    </p:spTree>
+  </p:cSld>
+  <p:clrMapOvr>
+    <a:masterClrMapping/>
+  </p:clrMapOvr>
+</p:sld>
 </file>
 
-<file path=ppt/slides/slide7.xml><?xml version="1.0" encoding="UTF-8" standalone="yes"?>
-<p:sld xmlns:a="http://schemas.openxmlformats.org/drawingml/2006/main" xmlns:r="http://schemas.openxmlformats.org/officeDocument/2006/relationships" xmlns:p="http://schemas.openxmlformats.org/presentationml/2006/main"><p:cSld name="Con người, hình ảnh & vai trò của học sinh"><p:bg><p:bgPr><a:solidFill><a:srgbClr val="FAF8F2"/></a:solidFill><a:effectLst/></p:bgPr></p:bg><p:spTree><p:nvGrpSpPr><p:cNvPr id="1" name=""/><p:cNvGrpSpPr/><p:nvPr/></p:nvGrpSpPr><p:grpSpPr><a:xfrm><a:off x="0" y="0"/><a:ext cx="0" cy="0"/><a:chOff x="0" y="0"/><a:chExt cx="0" cy="0"/></a:xfrm></p:grpSpPr><p:sp><p:nvSpPr><p:cNvPr id="2" name="Shape 2"/><p:cNvSpPr/><p:nvPr/></p:nvSpPr><p:spPr><a:xfrm><a:off x="0" y="0"/><a:ext cx="12192000" cy="1143000"/></a:xfrm><a:prstGeom prst="rect"><a:avLst/></a:prstGeom><a:solidFill><a:srgbClr val="0E3B2E"/></a:solidFill><a:ln/></p:spPr><p:txBody><a:bodyPr/><a:lstStyle/><a:p><a:pPr><a:buNone/></a:pPr><a:endParaRPr lang="vi-VN"/></a:p></p:txBody></p:sp><p:sp><p:nvSpPr><p:cNvPr id="3" name="Text 3"/><p:cNvSpPr/><p:nvPr/></p:nvSpPr><p:spPr><a:xfrm><a:off x="838200" y="228600"/><a:ext cx="1000000" cy="500000"/></a:xfrm><a:prstGeom prst="rect"><a:avLst/></a:prstGeom><a:noFill/><a:ln/></p:spPr><p:txBody><a:bodyPr wrap="square" rtlCol="0" anchor="t"><a:normAutofit/></a:bodyPr><a:lstStyle/><a:p><a:pPr algn="l" marL="0" indent="0"><a:buNone/></a:pPr><a:r><a:rPr lang="vi-VN" sz="2400" b="1" dirty="0"><a:solidFill><a:srgbClr val="D9A441"/></a:solidFill><a:latin typeface="Cambria" pitchFamily="34" charset="0"/><a:ea typeface="Cambria" pitchFamily="34" charset="-122"/><a:cs typeface="Cambria" pitchFamily="34" charset="-120"/></a:rPr><a:t>05</a:t></a:r></a:p></p:txBody></p:sp><p:sp><p:nvSpPr><p:cNvPr id="4" name="Text 4"/><p:cNvSpPr/><p:nvPr/></p:nvSpPr><p:spPr><a:xfrm><a:off x="1638300" y="274320"/><a:ext cx="9715500" cy="600000"/></a:xfrm><a:prstGeom prst="rect"><a:avLst/></a:prstGeom><a:noFill/><a:ln/></p:spPr><p:txBody><a:bodyPr wrap="square" rtlCol="0" anchor="t"><a:normAutofit/></a:bodyPr><a:lstStyle/><a:p><a:pPr algn="l" marL="0" indent="0"><a:buNone/></a:pPr><a:r><a:rPr lang="vi-VN" sz="2200" b="1" dirty="0"><a:solidFill><a:srgbClr val="FFFFFF"/></a:solidFill><a:latin typeface="Cambria" pitchFamily="34" charset="0"/><a:ea typeface="Cambria" pitchFamily="34" charset="-122"/><a:cs typeface="Cambria" pitchFamily="34" charset="-120"/></a:rPr><a:t>Con người, hình ảnh &amp; vai trò của học sinh</a:t></a:r></a:p></p:txBody></p:sp><p:sp><p:nvSpPr><p:cNvPr id="5" name="Text 5"/><p:cNvSpPr/><p:nvPr/></p:nvSpPr><p:spPr><a:xfrm><a:off x="838200" y="1524000"/><a:ext cx="10515600" cy="3200000"/></a:xfrm><a:prstGeom prst="rect"><a:avLst/></a:prstGeom><a:noFill/><a:ln/></p:spPr><p:txBody><a:bodyPr wrap="square" rtlCol="0" anchor="t"><a:normAutofit/></a:bodyPr><a:lstStyle/><a:p><a:pPr algn="l" marL="216000" indent="-216000"><a:buFont typeface="Arial" pitchFamily="34" charset="0"/><a:buChar char="&#8226;"/></a:pPr><a:r><a:rPr lang="vi-VN" sz="1400" dirty="0"><a:solidFill><a:srgbClr val="1F2A24"/></a:solidFill><a:latin typeface="Calibri" pitchFamily="34" charset="0"/><a:ea typeface="Calibri" pitchFamily="34" charset="-122"/><a:cs typeface="Calibri" pitchFamily="34" charset="-120"/></a:rPr><a:t>Nâng cao chất lượng nguồn nhân lực: ngoại ngữ, kĩ năng số, văn hoá ứng xử với du khách.</a:t></a:r></a:p><a:p><a:pPr algn="l" marL="216000" indent="-216000"><a:spcBef><a:spcPts val="900"/></a:spcBef><a:buFont typeface="Arial" pitchFamily="34" charset="0"/><a:buChar char="&#8226;"/></a:pPr><a:r><a:rPr lang="vi-VN" sz="1400" dirty="0"><a:solidFill><a:srgbClr val="1F2A24"/></a:solidFill><a:latin typeface="Calibri" pitchFamily="34" charset="0"/><a:ea typeface="Calibri" pitchFamily="34" charset="-122"/><a:cs typeface="Calibri" pitchFamily="34" charset="-120"/></a:rPr><a:t>Quảng bá hình ảnh Thành phố năng động, thân thiện, an toàn trên nền tảng số.</a:t></a:r></a:p><a:p><a:pPr algn="l" marL="216000" indent="-216000"><a:spcBef><a:spcPts val="900"/></a:spcBef><a:buFont typeface="Arial" pitchFamily="34" charset="0"/><a:buChar char="&#8226;"/></a:pPr><a:r><a:rPr lang="vi-VN" sz="1400" dirty="0"><a:solidFill><a:srgbClr val="1F2A24"/></a:solidFill><a:latin typeface="Calibri" pitchFamily="34" charset="0"/><a:ea typeface="Calibri" pitchFamily="34" charset="-122"/><a:cs typeface="Calibri" pitchFamily="34" charset="-120"/></a:rPr><a:t>Học sinh góp phần bằng việc giới thiệu đúng, đẹp về địa phương, giữ gìn vệ sinh, ứng xử văn minh và đề xuất ý tưởng sáng tạo.</a:t></a:r></a:p></p:txBody></p:sp><p:sp><p:nvSpPr><p:cNvPr id="6" name="Shape 6"/><p:cNvSpPr/><p:nvPr/></p:nvSpPr><p:spPr><a:xfrm><a:off x="838200" y="4876800"/><a:ext cx="10515600" cy="1000000"/></a:xfrm><a:prstGeom prst="roundRect"><a:avLst><a:gd name="adj" fmla="val 4000"/></a:avLst></a:prstGeom><a:solidFill><a:srgbClr val="ECEFE1"/></a:solidFill><a:ln/></p:spPr><p:txBody><a:bodyPr/><a:lstStyle/><a:p><a:pPr><a:buNone/></a:pPr><a:endParaRPr lang="vi-VN"/></a:p></p:txBody></p:sp><p:sp><p:nvSpPr><p:cNvPr id="7" name="Shape 7"/><p:cNvSpPr/><p:nvPr/></p:nvSpPr><p:spPr><a:xfrm><a:off x="838200" y="4876800"/><a:ext cx="45720" cy="1000000"/></a:xfrm><a:prstGeom prst="rect"><a:avLst/></a:prstGeom><a:solidFill><a:srgbClr val="D9A441"/></a:solidFill><a:ln/></p:spPr><p:txBody><a:bodyPr/><a:lstStyle/><a:p><a:pPr><a:buNone/></a:pPr><a:endParaRPr lang="vi-VN"/></a:p></p:txBody></p:sp><p:sp><p:nvSpPr><p:cNvPr id="8" name="Text 8"/><p:cNvSpPr/><p:nvPr/></p:nvSpPr><p:spPr><a:xfrm><a:off x="1021080" y="4968240"/><a:ext cx="10149840" cy="300000"/></a:xfrm><a:prstGeom prst="rect"><a:avLst/></a:prstGeom><a:noFill/><a:ln/></p:spPr><p:txBody><a:bodyPr wrap="square" rtlCol="0" anchor="t"><a:normAutofit/></a:bodyPr><a:lstStyle/><a:p><a:pPr algn="l" marL="0" indent="0"><a:buNone/></a:pPr><a:r><a:rPr lang="vi-VN" sz="1000" b="1" dirty="0"><a:solidFill><a:srgbClr val="D9A441"/></a:solidFill><a:latin typeface="Calibri" pitchFamily="34" charset="0"/><a:ea typeface="Calibri" pitchFamily="34" charset="-122"/><a:cs typeface="Calibri" pitchFamily="34" charset="-120"/></a:rPr><a:t>VÍ DỤ</a:t></a:r></a:p></p:txBody></p:sp><p:sp><p:nvSpPr><p:cNvPr id="9" name="Text 9"/><p:cNvSpPr/><p:nvPr/></p:nvSpPr><p:spPr><a:xfrm><a:off x="1021080" y="5257800"/><a:ext cx="10149840" cy="550000"/></a:xfrm><a:prstGeom prst="rect"><a:avLst/></a:prstGeom><a:noFill/><a:ln/></p:spPr><p:txBody><a:bodyPr wrap="square" rtlCol="0" anchor="t"><a:normAutofit/></a:bodyPr><a:lstStyle/><a:p><a:pPr algn="l" marL="0" indent="0"><a:buNone/></a:pPr><a:r><a:rPr lang="vi-VN" sz="1200" i="1" dirty="0"><a:solidFill><a:srgbClr val="5B6B62"/></a:solidFill><a:latin typeface="Calibri" pitchFamily="34" charset="0"/><a:ea typeface="Calibri" pitchFamily="34" charset="-122"/><a:cs typeface="Calibri" pitchFamily="34" charset="-120"/></a:rPr><a:t>Nhóm học sinh có thể thiết kế một tuyến “Một ngày xanh ở TP.HCM” (buýt đường sông – bảo tàng – ẩm thực địa phương) kèm bản đồ số và ghi nguồn tư liệu đầy đủ.</a:t></a:r></a:p></p:txBody></p:sp></p:spTree></p:cSld><p:clrMapOvr><a:masterClrMapping/></p:clrMapOvr></p:sld>
+<file path=ppt/slides/slide7.xml><?xml version="1.0" encoding="utf-8"?>
+<p:sld xmlns:a="http://schemas.openxmlformats.org/drawingml/2006/main" xmlns:r="http://schemas.openxmlformats.org/officeDocument/2006/relationships" xmlns:p="http://schemas.openxmlformats.org/presentationml/2006/main">
+  <p:cSld name="Con người, hình ảnh &amp; vai trò của học sinh">
+    <p:bg>
+      <p:bgPr>
+        <a:solidFill>
+          <a:srgbClr val="FAF8F2"/>
+        </a:solidFill>
+        <a:effectLst/>
+      </p:bgPr>
+    </p:bg>
+    <p:spTree>
+      <p:nvGrpSpPr>
+        <p:cNvPr id="1" name=""/>
+        <p:cNvGrpSpPr/>
+        <p:nvPr/>
+      </p:nvGrpSpPr>
+      <p:grpSpPr>
+        <a:xfrm>
+          <a:off x="0" y="0"/>
+          <a:ext cx="0" cy="0"/>
+          <a:chOff x="0" y="0"/>
+          <a:chExt cx="0" cy="0"/>
+        </a:xfrm>
+      </p:grpSpPr>
+      <p:sp>
+        <p:nvSpPr>
+          <p:cNvPr id="2" name="Shape 2"/>
+          <p:cNvSpPr/>
+          <p:nvPr/>
+        </p:nvSpPr>
+        <p:spPr>
+          <a:xfrm>
+            <a:off x="0" y="0"/>
+            <a:ext cx="12192000" cy="1143000"/>
+          </a:xfrm>
+          <a:prstGeom prst="rect">
+            <a:avLst/>
+          </a:prstGeom>
+          <a:solidFill>
+            <a:srgbClr val="0E3B2E"/>
+          </a:solidFill>
+          <a:ln/>
+        </p:spPr>
+        <p:txBody>
+          <a:bodyPr/>
+          <a:lstStyle/>
+          <a:p>
+            <a:pPr>
+              <a:buNone/>
+            </a:pPr>
+            <a:endParaRPr lang="vi-VN"/>
+          </a:p>
+        </p:txBody>
+      </p:sp>
+      <p:sp>
+        <p:nvSpPr>
+          <p:cNvPr id="3" name="Text 3"/>
+          <p:cNvSpPr/>
+          <p:nvPr/>
+        </p:nvSpPr>
+        <p:spPr>
+          <a:xfrm>
+            <a:off x="838200" y="228600"/>
+            <a:ext cx="1000000" cy="500000"/>
+          </a:xfrm>
+          <a:prstGeom prst="rect">
+            <a:avLst/>
+          </a:prstGeom>
+          <a:noFill/>
+          <a:ln/>
+        </p:spPr>
+        <p:txBody>
+          <a:bodyPr wrap="square" rtlCol="0" anchor="t">
+            <a:normAutofit/>
+          </a:bodyPr>
+          <a:lstStyle/>
+          <a:p>
+            <a:pPr algn="l" marL="0" indent="0">
+              <a:buNone/>
+            </a:pPr>
+            <a:r>
+              <a:rPr lang="vi-VN" sz="2400" b="1" dirty="0">
+                <a:solidFill>
+                  <a:srgbClr val="D9A441"/>
+                </a:solidFill>
+                <a:latin typeface="Cambria" pitchFamily="34" charset="0"/>
+                <a:ea typeface="Cambria" pitchFamily="34" charset="-122"/>
+                <a:cs typeface="Cambria" pitchFamily="34" charset="-120"/>
+              </a:rPr>
+              <a:t>05</a:t>
+            </a:r>
+          </a:p>
+        </p:txBody>
+      </p:sp>
+      <p:sp>
+        <p:nvSpPr>
+          <p:cNvPr id="4" name="Text 4"/>
+          <p:cNvSpPr/>
+          <p:nvPr/>
+        </p:nvSpPr>
+        <p:spPr>
+          <a:xfrm>
+            <a:off x="1638300" y="274320"/>
+            <a:ext cx="9715500" cy="600000"/>
+          </a:xfrm>
+          <a:prstGeom prst="rect">
+            <a:avLst/>
+          </a:prstGeom>
+          <a:noFill/>
+          <a:ln/>
+        </p:spPr>
+        <p:txBody>
+          <a:bodyPr wrap="square" rtlCol="0" anchor="t">
+            <a:normAutofit/>
+          </a:bodyPr>
+          <a:lstStyle/>
+          <a:p>
+            <a:pPr algn="l" marL="0" indent="0">
+              <a:buNone/>
+            </a:pPr>
+            <a:r>
+              <a:rPr lang="vi-VN" sz="2200" b="1" dirty="0">
+                <a:solidFill>
+                  <a:srgbClr val="FFFFFF"/>
+                </a:solidFill>
+                <a:latin typeface="Cambria" pitchFamily="34" charset="0"/>
+                <a:ea typeface="Cambria" pitchFamily="34" charset="-122"/>
+                <a:cs typeface="Cambria" pitchFamily="34" charset="-120"/>
+              </a:rPr>
+              <a:t>Con người, hình ảnh &amp; vai trò của học sinh</a:t>
+            </a:r>
+          </a:p>
+        </p:txBody>
+      </p:sp>
+      <p:sp>
+        <p:nvSpPr>
+          <p:cNvPr id="5" name="Text 5"/>
+          <p:cNvSpPr/>
+          <p:nvPr/>
+        </p:nvSpPr>
+        <p:spPr>
+          <a:xfrm>
+            <a:off x="838200" y="1524000"/>
+            <a:ext cx="10515600" cy="3200000"/>
+          </a:xfrm>
+          <a:prstGeom prst="rect">
+            <a:avLst/>
+          </a:prstGeom>
+          <a:noFill/>
+          <a:ln/>
+        </p:spPr>
+        <p:txBody>
+          <a:bodyPr wrap="square" rtlCol="0" anchor="t">
+            <a:normAutofit/>
+          </a:bodyPr>
+          <a:lstStyle/>
+          <a:p>
+            <a:pPr algn="l" marL="216000" indent="-216000">
+              <a:buFont typeface="Arial" pitchFamily="34" charset="0"/>
+              <a:buChar char="•"/>
+            </a:pPr>
+            <a:r>
+              <a:rPr lang="vi-VN" sz="1400" dirty="0">
+                <a:solidFill>
+                  <a:srgbClr val="1F2A24"/>
+                </a:solidFill>
+                <a:latin typeface="Calibri" pitchFamily="34" charset="0"/>
+                <a:ea typeface="Calibri" pitchFamily="34" charset="-122"/>
+                <a:cs typeface="Calibri" pitchFamily="34" charset="-120"/>
+              </a:rPr>
+              <a:t>Nâng cao chất lượng nguồn nhân lực: ngoại ngữ, kĩ năng số, văn hoá ứng xử với du khách.</a:t>
+            </a:r>
+          </a:p>
+          <a:p>
+            <a:pPr algn="l" marL="216000" indent="-216000">
+              <a:spcBef>
+                <a:spcPts val="900"/>
+              </a:spcBef>
+              <a:buFont typeface="Arial" pitchFamily="34" charset="0"/>
+              <a:buChar char="•"/>
+            </a:pPr>
+            <a:r>
+              <a:rPr lang="vi-VN" sz="1400" dirty="0">
+                <a:solidFill>
+                  <a:srgbClr val="1F2A24"/>
+                </a:solidFill>
+                <a:latin typeface="Calibri" pitchFamily="34" charset="0"/>
+                <a:ea typeface="Calibri" pitchFamily="34" charset="-122"/>
+                <a:cs typeface="Calibri" pitchFamily="34" charset="-120"/>
+              </a:rPr>
+              <a:t>Quảng bá hình ảnh Thành phố năng động, thân thiện, an toàn trên nền tảng số.</a:t>
+            </a:r>
+          </a:p>
+          <a:p>
+            <a:pPr algn="l" marL="216000" indent="-216000">
+              <a:spcBef>
+                <a:spcPts val="900"/>
+              </a:spcBef>
+              <a:buFont typeface="Arial" pitchFamily="34" charset="0"/>
+              <a:buChar char="•"/>
+            </a:pPr>
+            <a:r>
+              <a:rPr lang="vi-VN" sz="1400" dirty="0">
+                <a:solidFill>
+                  <a:srgbClr val="1F2A24"/>
+                </a:solidFill>
+                <a:latin typeface="Calibri" pitchFamily="34" charset="0"/>
+                <a:ea typeface="Calibri" pitchFamily="34" charset="-122"/>
+                <a:cs typeface="Calibri" pitchFamily="34" charset="-120"/>
+              </a:rPr>
+              <a:t>Học sinh góp phần bằng việc giới thiệu đúng, đẹp về địa phương, giữ gìn vệ sinh, ứng xử văn minh và đề xuất ý tưởng sáng tạo.</a:t>
+            </a:r>
+          </a:p>
+        </p:txBody>
+      </p:sp>
+      <p:sp>
+        <p:nvSpPr>
+          <p:cNvPr id="6" name="Shape 6"/>
+          <p:cNvSpPr/>
+          <p:nvPr/>
+        </p:nvSpPr>
+        <p:spPr>
+          <a:xfrm>
+            <a:off x="838200" y="4876800"/>
+            <a:ext cx="10515600" cy="1000000"/>
+          </a:xfrm>
+          <a:prstGeom prst="roundRect">
+            <a:avLst>
+              <a:gd name="adj" fmla="val 4000"/>
+            </a:avLst>
+          </a:prstGeom>
+          <a:solidFill>
+            <a:srgbClr val="ECEFE1"/>
+          </a:solidFill>
+          <a:ln/>
+        </p:spPr>
+        <p:txBody>
+          <a:bodyPr/>
+          <a:lstStyle/>
+          <a:p>
+            <a:pPr>
+              <a:buNone/>
+            </a:pPr>
+            <a:endParaRPr lang="vi-VN"/>
+          </a:p>
+        </p:txBody>
+      </p:sp>
+      <p:sp>
+        <p:nvSpPr>
+          <p:cNvPr id="7" name="Shape 7"/>
+          <p:cNvSpPr/>
+          <p:nvPr/>
+        </p:nvSpPr>
+        <p:spPr>
+          <a:xfrm>
+            <a:off x="838200" y="4876800"/>
+            <a:ext cx="45720" cy="1000000"/>
+          </a:xfrm>
+          <a:prstGeom prst="rect">
+            <a:avLst/>
+          </a:prstGeom>
+          <a:solidFill>
+            <a:srgbClr val="D9A441"/>
+          </a:solidFill>
+          <a:ln/>
+        </p:spPr>
+        <p:txBody>
+          <a:bodyPr/>
+          <a:lstStyle/>
+          <a:p>
+            <a:pPr>
+              <a:buNone/>
+            </a:pPr>
+            <a:endParaRPr lang="vi-VN"/>
+          </a:p>
+        </p:txBody>
+      </p:sp>
+      <p:sp>
+        <p:nvSpPr>
+          <p:cNvPr id="8" name="Text 8"/>
+          <p:cNvSpPr/>
+          <p:nvPr/>
+        </p:nvSpPr>
+        <p:spPr>
+          <a:xfrm>
+            <a:off x="1021080" y="4968240"/>
+            <a:ext cx="10149840" cy="300000"/>
+          </a:xfrm>
+          <a:prstGeom prst="rect">
+            <a:avLst/>
+          </a:prstGeom>
+          <a:noFill/>
+          <a:ln/>
+        </p:spPr>
+        <p:txBody>
+          <a:bodyPr wrap="square" rtlCol="0" anchor="t">
+            <a:normAutofit/>
+          </a:bodyPr>
+          <a:lstStyle/>
+          <a:p>
+            <a:pPr algn="l" marL="0" indent="0">
+              <a:buNone/>
+            </a:pPr>
+            <a:r>
+              <a:rPr lang="vi-VN" sz="1000" b="1" dirty="0">
+                <a:solidFill>
+                  <a:srgbClr val="D9A441"/>
+                </a:solidFill>
+                <a:latin typeface="Calibri" pitchFamily="34" charset="0"/>
+                <a:ea typeface="Calibri" pitchFamily="34" charset="-122"/>
+                <a:cs typeface="Calibri" pitchFamily="34" charset="-120"/>
+              </a:rPr>
+              <a:t>VÍ DỤ</a:t>
+            </a:r>
+          </a:p>
+        </p:txBody>
+      </p:sp>
+      <p:sp>
+        <p:nvSpPr>
+          <p:cNvPr id="9" name="Text 9"/>
+          <p:cNvSpPr/>
+          <p:nvPr/>
+        </p:nvSpPr>
+        <p:spPr>
+          <a:xfrm>
+            <a:off x="1021080" y="5257800"/>
+            <a:ext cx="10149840" cy="550000"/>
+          </a:xfrm>
+          <a:prstGeom prst="rect">
+            <a:avLst/>
+          </a:prstGeom>
+          <a:noFill/>
+          <a:ln/>
+        </p:spPr>
+        <p:txBody>
+          <a:bodyPr wrap="square" rtlCol="0" anchor="t">
+            <a:normAutofit/>
+          </a:bodyPr>
+          <a:lstStyle/>
+          <a:p>
+            <a:pPr algn="l" marL="0" indent="0">
+              <a:buNone/>
+            </a:pPr>
+            <a:r>
+              <a:rPr lang="vi-VN" sz="1200" i="1" dirty="0">
+                <a:solidFill>
+                  <a:srgbClr val="5B6B62"/>
+                </a:solidFill>
+                <a:latin typeface="Calibri" pitchFamily="34" charset="0"/>
+                <a:ea typeface="Calibri" pitchFamily="34" charset="-122"/>
+                <a:cs typeface="Calibri" pitchFamily="34" charset="-120"/>
+              </a:rPr>
+              <a:t>Nhóm học sinh có thể thiết kế một tuyến “Một ngày xanh ở TP.HCM” (buýt đường sông – bảo tàng – ẩm thực địa phương) kèm bản đồ số và ghi nguồn tư liệu đầy đủ.</a:t>
+            </a:r>
+          </a:p>
+        </p:txBody>
+      </p:sp>
+    </p:spTree>
+  </p:cSld>
+  <p:clrMapOvr>
+    <a:masterClrMapping/>
+  </p:clrMapOvr>
+</p:sld>
 </file>
 
 <file path=ppt/slides/slide8.xml><?xml version="1.0" encoding="utf-8"?>
